--- a/03_Presentations/W08_showcase.pptx
+++ b/03_Presentations/W08_showcase.pptx
@@ -2,19 +2,18 @@
 <file path=ppt/presentation.xml><?xml version="1.0" encoding="utf-8"?>
 <p:presentation xmlns:p="http://schemas.openxmlformats.org/presentationml/2006/main">
   <p:sldMasterIdLst>
-    <p:sldMasterId xmlns:r="http://schemas.openxmlformats.org/officeDocument/2006/relationships" id="2147483648" r:id="R675a13cc32794d02"/>
+    <p:sldMasterId xmlns:r="http://schemas.openxmlformats.org/officeDocument/2006/relationships" id="2147483648" r:id="Rdff14fc965fd4f58"/>
   </p:sldMasterIdLst>
   <p:notesMasterIdLst>
-    <p:notesMasterId xmlns:r="http://schemas.openxmlformats.org/officeDocument/2006/relationships" r:id="R94f72b36493447af"/>
+    <p:notesMasterId xmlns:r="http://schemas.openxmlformats.org/officeDocument/2006/relationships" r:id="Rde98ea10f5054188"/>
   </p:notesMasterIdLst>
   <p:sldIdLst>
-    <p:sldId xmlns:r="http://schemas.openxmlformats.org/officeDocument/2006/relationships" id="256" r:id="R5c7b5c0e1b2b46ef"/>
-    <p:sldId xmlns:r="http://schemas.openxmlformats.org/officeDocument/2006/relationships" id="257" r:id="R75b88350c7b84b27"/>
-    <p:sldId xmlns:r="http://schemas.openxmlformats.org/officeDocument/2006/relationships" id="258" r:id="R86b932c85ab44789"/>
-    <p:sldId xmlns:r="http://schemas.openxmlformats.org/officeDocument/2006/relationships" id="259" r:id="R255d2b27008446f1"/>
-    <p:sldId xmlns:r="http://schemas.openxmlformats.org/officeDocument/2006/relationships" id="260" r:id="R204fa6a2b848459e"/>
-    <p:sldId xmlns:r="http://schemas.openxmlformats.org/officeDocument/2006/relationships" id="261" r:id="Raf2e53a621384d1e"/>
-    <p:sldId xmlns:r="http://schemas.openxmlformats.org/officeDocument/2006/relationships" id="262" r:id="Rc3851990fd5c424c"/>
+    <p:sldId xmlns:r="http://schemas.openxmlformats.org/officeDocument/2006/relationships" id="256" r:id="Rb5bcf9375b7e4000"/>
+    <p:sldId xmlns:r="http://schemas.openxmlformats.org/officeDocument/2006/relationships" id="257" r:id="R5174a5ceba7a4392"/>
+    <p:sldId xmlns:r="http://schemas.openxmlformats.org/officeDocument/2006/relationships" id="258" r:id="Ref0b421d99be4243"/>
+    <p:sldId xmlns:r="http://schemas.openxmlformats.org/officeDocument/2006/relationships" id="259" r:id="R9f6c2d46b9e64eb4"/>
+    <p:sldId xmlns:r="http://schemas.openxmlformats.org/officeDocument/2006/relationships" id="260" r:id="Rc1239d93d903497f"/>
+    <p:sldId xmlns:r="http://schemas.openxmlformats.org/officeDocument/2006/relationships" id="261" r:id="R5dfda788659a48e3"/>
   </p:sldIdLst>
   <p:sldSz cx="12192000" cy="6858000"/>
   <p:notesSz cx="6858000" cy="9144000"/>
@@ -448,17 +447,127 @@
           <a:lstStyle xmlns:a="http://schemas.openxmlformats.org/drawingml/2006/main"/>
           <a:p xmlns:a="http://schemas.openxmlformats.org/drawingml/2006/main">
             <a:r>
-              <a:t>0–7 minutes: complete the final concept check before the demo briefing. What do you want your audience to understand about the decision your robot makes?</a:t>
-            </a:r>
-          </a:p>
-          <a:p xmlns:a="http://schemas.openxmlformats.org/drawingml/2006/main">
-            <a:r>
-              <a:t>Learning goal: Each student explains a programming idea and compares a prediction with a result in a short demonstration.</a:t>
-            </a:r>
-          </a:p>
-          <a:p xmlns:a="http://schemas.openxmlformats.org/drawingml/2006/main">
-            <a:r>
-              <a:t>Minimum success: Every pair demonstrates or explains its prototype, every student completes the final assessment, and families receive an optional next-step invitation through the adult coordinator.</a:t>
+              <a:t>PREPARATION</a:t>
+            </a:r>
+          </a:p>
+          <a:p xmlns:a="http://schemas.openxmlformats.org/drawingml/2006/main">
+            <a:r>
+              <a:t/>
+            </a:r>
+          </a:p>
+          <a:p xmlns:a="http://schemas.openxmlformats.org/drawingml/2006/main">
+            <a:r>
+              <a:t>Week 8 Robot showcase</a:t>
+            </a:r>
+          </a:p>
+          <a:p xmlns:a="http://schemas.openxmlformats.org/drawingml/2006/main">
+            <a:r>
+              <a:t/>
+            </a:r>
+          </a:p>
+          <a:p xmlns:a="http://schemas.openxmlformats.org/drawingml/2006/main">
+            <a:r>
+              <a:t>Speaker notes for the six-slide class presentation. Use the slides as brief prompts and leave time for children to build, operate and explain. This is a robotics session with a small prepared Python recipe.</a:t>
+            </a:r>
+          </a:p>
+          <a:p xmlns:a="http://schemas.openxmlformats.org/drawingml/2006/main">
+            <a:r>
+              <a:t/>
+            </a:r>
+          </a:p>
+          <a:p xmlns:a="http://schemas.openxmlformats.org/drawingml/2006/main">
+            <a:r>
+              <a:t>Class setup</a:t>
+            </a:r>
+          </a:p>
+          <a:p xmlns:a="http://schemas.openxmlformats.org/drawingml/2006/main">
+            <a:r>
+              <a:t/>
+            </a:r>
+          </a:p>
+          <a:p xmlns:a="http://schemas.openxmlformats.org/drawingml/2006/main">
+            <a:r>
+              <a:t>12 children in grades 5–6 form four teams of three: T1/T2 share Kit A and T3/T4 share Kit B. Four student instructors cover two robot stations and two build tables; a fifth or sixth can float. The adult lead oversees the room and YMCA procedures. Bring four available laptops: two remain connected to robots and two show build references. Printed build cards make the build activity work with two laptops too.</a:t>
+            </a:r>
+          </a:p>
+          <a:p xmlns:a="http://schemas.openxmlformats.org/drawingml/2006/main">
+            <a:r>
+              <a:t/>
+            </a:r>
+          </a:p>
+          <a:p xmlns:a="http://schemas.openxmlformats.org/drawingml/2006/main">
+            <a:r>
+              <a:t>Learning goal Each child explains a programming idea and compares a prediction with a result in a short demonstration.</a:t>
+            </a:r>
+          </a:p>
+          <a:p xmlns:a="http://schemas.openxmlformats.org/drawingml/2006/main">
+            <a:r>
+              <a:t/>
+            </a:r>
+          </a:p>
+          <a:p xmlns:a="http://schemas.openxmlformats.org/drawingml/2006/main">
+            <a:r>
+              <a:t>Minimum success Every team demonstrates or explains its prototype, every student completes the final assessment, and families receive an optional next-step invitation through the adult coordinator.</a:t>
+            </a:r>
+          </a:p>
+          <a:p xmlns:a="http://schemas.openxmlformats.org/drawingml/2006/main">
+            <a:r>
+              <a:t/>
+            </a:r>
+          </a:p>
+          <a:p xmlns:a="http://schemas.openxmlformats.org/drawingml/2006/main">
+            <a:r>
+              <a:t>Prepare Confirm any visitors with YMCA staff. Load team projects and inspect lanes before arrival. Use W08_showcase.py only as a clean fallback; normally reopen the team’s week 7 program. No last-minute firmware update. Prepare two mentor examples and four labeled team build packs. Rehearse attachment clearance, a hand test and a quick swap. Show the hub color guide.</a:t>
+            </a:r>
+          </a:p>
+          <a:p xmlns:a="http://schemas.openxmlformats.org/drawingml/2006/main">
+            <a:r>
+              <a:t/>
+            </a:r>
+          </a:p>
+          <a:p xmlns:a="http://schemas.openxmlformats.org/drawingml/2006/main">
+            <a:r>
+              <a:t>Materials and files Print and pack from the matching checklist in 01_Instructor/Class_Preparation. Use the team sheet and build card. Keep the original two bases assembled, A left/B right, auxiliary motor unplugged; add C/D only as the lessons require. Hardware rehearsal remains required.</a:t>
+            </a:r>
+          </a:p>
+          <a:p xmlns:a="http://schemas.openxmlformats.org/drawingml/2006/main">
+            <a:r>
+              <a:t/>
+            </a:r>
+          </a:p>
+          <a:p xmlns:a="http://schemas.openxmlformats.org/drawingml/2006/main">
+            <a:r>
+              <a:t>Slide 1 Robot showcase</a:t>
+            </a:r>
+          </a:p>
+          <a:p xmlns:a="http://schemas.openxmlformats.org/drawingml/2006/main">
+            <a:r>
+              <a:t/>
+            </a:r>
+          </a:p>
+          <a:p xmlns:a="http://schemas.openxmlformats.org/drawingml/2006/main">
+            <a:r>
+              <a:t>Timing 0–7 minutes</a:t>
+            </a:r>
+          </a:p>
+          <a:p xmlns:a="http://schemas.openxmlformats.org/drawingml/2006/main">
+            <a:r>
+              <a:t/>
+            </a:r>
+          </a:p>
+          <a:p xmlns:a="http://schemas.openxmlformats.org/drawingml/2006/main">
+            <a:r>
+              <a:t>Say “First, show what you can explain on your own. This is the same set of ideas we asked about at the beginning. Use your own thinking; ‘not sure’ is still an honest answer.”</a:t>
+            </a:r>
+          </a:p>
+          <a:p xmlns:a="http://schemas.openxmlformats.org/drawingml/2006/main">
+            <a:r>
+              <a:t/>
+            </a:r>
+          </a:p>
+          <a:p xmlns:a="http://schemas.openxmlformats.org/drawingml/2006/main">
+            <a:r>
+              <a:t>Do  Give each child the individual final check and keep the code slide hidden. Read questions aloud if needed without hints. Allow “not sure,” collect by student ID, and record any support. Do not compare answers until the check ends.</a:t>
             </a:r>
           </a:p>
         </p:txBody>
@@ -528,17 +637,37 @@
           <a:lstStyle xmlns:a="http://schemas.openxmlformats.org/drawingml/2006/main"/>
           <a:p xmlns:a="http://schemas.openxmlformats.org/drawingml/2006/main">
             <a:r>
-              <a:t>5–10 minutes, or 7–12 in week 8. Demonstrate a brief explanation: “We expected __. We measured __. We changed __.” Show that an honest explanation of a failed run is useful engineering evidence.</a:t>
-            </a:r>
-          </a:p>
-          <a:p xmlns:a="http://schemas.openxmlformats.org/drawingml/2006/main">
-            <a:r>
-              <a:t>Preparation: Confirm any visitors with YMCA staff. Load pair projects and inspect lanes before arrival. Use W08_showcase.py only as a clean fallback; normally reopen the pair’s week 7 program. No last-minute firmware update.</a:t>
-            </a:r>
-          </a:p>
-          <a:p xmlns:a="http://schemas.openxmlformats.org/drawingml/2006/main">
-            <a:r>
-              <a:t>The core challenge uses an assembled base and the supplied complete project.</a:t>
+              <a:t>Slide 2 Todays robot challenge</a:t>
+            </a:r>
+          </a:p>
+          <a:p xmlns:a="http://schemas.openxmlformats.org/drawingml/2006/main">
+            <a:r>
+              <a:t/>
+            </a:r>
+          </a:p>
+          <a:p xmlns:a="http://schemas.openxmlformats.org/drawingml/2006/main">
+            <a:r>
+              <a:t>Timing 7–12 minutes</a:t>
+            </a:r>
+          </a:p>
+          <a:p xmlns:a="http://schemas.openxmlformats.org/drawingml/2006/main">
+            <a:r>
+              <a:t/>
+            </a:r>
+          </a:p>
+          <a:p xmlns:a="http://schemas.openxmlformats.org/drawingml/2006/main">
+            <a:r>
+              <a:t>Say “Your audience needs to understand the useful job, one program decision, and the evidence. A successful presentation tells the truth about the run.”</a:t>
+            </a:r>
+          </a:p>
+          <a:p xmlns:a="http://schemas.openxmlformats.org/drawingml/2006/main">
+            <a:r>
+              <a:t/>
+            </a:r>
+          </a:p>
+          <a:p xmlns:a="http://schemas.openxmlformats.org/drawingml/2006/main">
+            <a:r>
+              <a:t>Hub check Read the light on the correct button: steady green center means powered on with a compatible OS and at least 20% battery; flashing orange center means charge; flashing red center means stop, power off and cool for 15 minutes. White center needs a compatible OS; flashing purple center means updating. Blue is the connection button: flashing means waiting for Bluetooth, steady means connected. A display letter is a program output, not a battery or connection status. See the full SPIKE Hub Color Guide.</a:t>
             </a:r>
           </a:p>
         </p:txBody>
@@ -608,17 +737,87 @@
           <a:lstStyle xmlns:a="http://schemas.openxmlformats.org/drawingml/2006/main"/>
           <a:p xmlns:a="http://schemas.openxmlformats.org/drawingml/2006/main">
             <a:r>
-              <a:t>This is a discussion fragment. It belongs in the supplied project, not in an empty file. The student function is named student_recipe. Demonstrate a brief explanation: “We expected __. We measured __. We changed __.” Show that an honest explanation of a failed run is useful engineering evidence.</a:t>
-            </a:r>
-          </a:p>
-          <a:p xmlns:a="http://schemas.openxmlformats.org/drawingml/2006/main">
-            <a:r>
-              <a:t>Expected reasoning: Use the same baseline key in the instructor guide. Report what actually happened during the demo, not the intended outcome. Future FRC interest is optional and separate from demonstrated learning.</a:t>
-            </a:r>
-          </a:p>
-          <a:p xmlns:a="http://schemas.openxmlformats.org/drawingml/2006/main">
-            <a:r>
-              <a:t>Technical references: https://spike.legoeducation.com/prime/modal/help/lls-help-python ; https://tuftsceeo.github.io/SPIKEPythonDocs/SPIKE3.html</a:t>
+              <a:t>Slide 3 Code and prediction for the showcase</a:t>
+            </a:r>
+          </a:p>
+          <a:p xmlns:a="http://schemas.openxmlformats.org/drawingml/2006/main">
+            <a:r>
+              <a:t/>
+            </a:r>
+          </a:p>
+          <a:p xmlns:a="http://schemas.openxmlformats.org/drawingml/2006/main">
+            <a:r>
+              <a:t>Timing 7–12 minutes within the same briefing</a:t>
+            </a:r>
+          </a:p>
+          <a:p xmlns:a="http://schemas.openxmlformats.org/drawingml/2006/main">
+            <a:r>
+              <a:t/>
+            </a:r>
+          </a:p>
+          <a:p xmlns:a="http://schemas.openxmlformats.org/drawingml/2006/main">
+            <a:r>
+              <a:t>await signal("Y")</a:t>
+            </a:r>
+          </a:p>
+          <a:p xmlns:a="http://schemas.openxmlformats.org/drawingml/2006/main">
+            <a:r>
+              <a:t>result = await seek_marker(threshold)</a:t>
+            </a:r>
+          </a:p>
+          <a:p xmlns:a="http://schemas.openxmlformats.org/drawingml/2006/main">
+            <a:r>
+              <a:t>print("Our result:", result)</a:t>
+            </a:r>
+          </a:p>
+          <a:p xmlns:a="http://schemas.openxmlformats.org/drawingml/2006/main">
+            <a:r>
+              <a:t/>
+            </a:r>
+          </a:p>
+          <a:p xmlns:a="http://schemas.openxmlformats.org/drawingml/2006/main">
+            <a:r>
+              <a:t>Say “This slide is one marker example. Your saved mission may use parking or a different signal. Explain your own program and its real result.”</a:t>
+            </a:r>
+          </a:p>
+          <a:p xmlns:a="http://schemas.openxmlformats.org/drawingml/2006/main">
+            <a:r>
+              <a:t/>
+            </a:r>
+          </a:p>
+          <a:p xmlns:a="http://schemas.openxmlformats.org/drawingml/2006/main">
+            <a:r>
+              <a:t>Point signal shows Y, seek_marker uses the calibrated threshold and returns a reason, and print reports that reason. A returned limit means the bounded search ended without detecting the marker. The display and printed result do not establish whether a cube arrived.</a:t>
+            </a:r>
+          </a:p>
+          <a:p xmlns:a="http://schemas.openxmlformats.org/drawingml/2006/main">
+            <a:r>
+              <a:t/>
+            </a:r>
+          </a:p>
+          <a:p xmlns:a="http://schemas.openxmlformats.org/drawingml/2006/main">
+            <a:r>
+              <a:t>Ask “Which line or function makes your key decision? What observation will show whether the useful job worked?” Take one quick answer; teams practice their own explanations next.</a:t>
+            </a:r>
+          </a:p>
+          <a:p xmlns:a="http://schemas.openxmlformats.org/drawingml/2006/main">
+            <a:r>
+              <a:t/>
+            </a:r>
+          </a:p>
+          <a:p xmlns:a="http://schemas.openxmlformats.org/drawingml/2006/main">
+            <a:r>
+              <a:t>Ask Before the demo, predict the stop reason. What will you explain if the robot stops for a limit instead of detecting its target?</a:t>
+            </a:r>
+          </a:p>
+          <a:p xmlns:a="http://schemas.openxmlformats.org/drawingml/2006/main">
+            <a:r>
+              <a:t/>
+            </a:r>
+          </a:p>
+          <a:p xmlns:a="http://schemas.openxmlformats.org/drawingml/2006/main">
+            <a:r>
+              <a:t>Expected response “If the result is limit, the program reached its movement allowance without recognizing the target. We would check the reading, starting distance and setup next.” Parking can also report invalid, which calls for a sensor check. Neither is a successful target detection.</a:t>
             </a:r>
           </a:p>
         </p:txBody>
@@ -688,17 +887,77 @@
           <a:lstStyle xmlns:a="http://schemas.openxmlformats.org/drawingml/2006/main"/>
           <a:p xmlns:a="http://schemas.openxmlformats.org/drawingml/2006/main">
             <a:r>
-              <a:t>10–15 minutes in the standard lesson. Before the demo, predict the stop reason. What will you explain if the robot stops for a limit instead of detecting its target?</a:t>
-            </a:r>
-          </a:p>
-          <a:p xmlns:a="http://schemas.openxmlformats.org/drawingml/2006/main">
-            <a:r>
-              <a:t>Do not reveal the answer immediately. Ask students to point to a line or a measured value. Expected reasoning: Use the same baseline key in the instructor guide. Report what actually happened during the demo, not the intended outcome. Future FRC interest is optional and separate from demonstrated learning.</a:t>
-            </a:r>
-          </a:p>
-          <a:p xmlns:a="http://schemas.openxmlformats.org/drawingml/2006/main">
-            <a:r>
-              <a:t>Support: Allow a partner interview, pointing to code, or a recorded explanation prepared with staff. Participation and honest reasoning count even if the robot does not complete its route.</a:t>
+              <a:t>Slide 4 Our demonstration order</a:t>
+            </a:r>
+          </a:p>
+          <a:p xmlns:a="http://schemas.openxmlformats.org/drawingml/2006/main">
+            <a:r>
+              <a:t/>
+            </a:r>
+          </a:p>
+          <a:p xmlns:a="http://schemas.openxmlformats.org/drawingml/2006/main">
+            <a:r>
+              <a:t>Timing 12–44 minutes</a:t>
+            </a:r>
+          </a:p>
+          <a:p xmlns:a="http://schemas.openxmlformats.org/drawingml/2006/main">
+            <a:r>
+              <a:t/>
+            </a:r>
+          </a:p>
+          <a:p xmlns:a="http://schemas.openxmlformats.org/drawingml/2006/main">
+            <a:r>
+              <a:t>Station map 12–18: T1/T3 rehearse; T2/T4 finish exhibits. 18–24: switch. Rotate robot jobs every two minutes. 24–28: set up. 28–44: T1, T2, T3 and T4 each have four minutes including reset. Each child explains one part.</a:t>
+            </a:r>
+          </a:p>
+          <a:p xmlns:a="http://schemas.openxmlformats.org/drawingml/2006/main">
+            <a:r>
+              <a:t/>
+            </a:r>
+          </a:p>
+          <a:p xmlns:a="http://schemas.openxmlformats.org/drawingml/2006/main">
+            <a:r>
+              <a:t>Jobs At the robot, the driver edits and starts after “clear.” The navigator reads the step, predicts, positions the stopped robot and payload, fits an approved attachment and checks the lane. The observer watches, measures and records one number, tick or phrase. Rotate all three jobs every two minutes during the six-minute rehearsal. Assign each child one short speaking part for the demonstration. At the build table, rotate builder, designer/parts manager and tester/reporter on the same timer. Everyone contributes hands-on work.</a:t>
+            </a:r>
+          </a:p>
+          <a:p xmlns:a="http://schemas.openxmlformats.org/drawingml/2006/main">
+            <a:r>
+              <a:t/>
+            </a:r>
+          </a:p>
+          <a:p xmlns:a="http://schemas.openxmlformats.org/drawingml/2006/main">
+            <a:r>
+              <a:t>Robot steps 1. Complete the four concept questions independently at 0–7, before the briefing. 2. Brief and predict at 7–12. T1/T3 rehearse at 12–18 and T2/T4 at 18–24, rotating jobs every two minutes. The other team finishes its exhibit. 3. Save and set up at 24–28. Each child rehearses one speaking part. 4. T1, T2, T3 and T4 each have four minutes at 28–44 for an explanation, run, question and reset. If a run fails, explain the actual stop reason and next test. 5. Celebrate specific evidence at 44–50. Reflect and offer optional next steps at 50–54. Save, pack and dismiss at 54–60.</a:t>
+            </a:r>
+          </a:p>
+          <a:p xmlns:a="http://schemas.openxmlformats.org/drawingml/2006/main">
+            <a:r>
+              <a:t/>
+            </a:r>
+          </a:p>
+          <a:p xmlns:a="http://schemas.openxmlformats.org/drawingml/2006/main">
+            <a:r>
+              <a:t>Build A working exhibit for the showcase. Finish a stable exhibit that helps visitors understand the team’s robot job. Repair or strengthen one loose part of the saved build. Add a small sign or model showing the user and useful job. Rehearse three short speaking parts while the robot is with the other team. Test: Exhibit stands, robot lane stays clear, and each child can explain one part.</a:t>
+            </a:r>
+          </a:p>
+          <a:p xmlns:a="http://schemas.openxmlformats.org/drawingml/2006/main">
+            <a:r>
+              <a:t/>
+            </a:r>
+          </a:p>
+          <a:p xmlns:a="http://schemas.openxmlformats.org/drawingml/2006/main">
+            <a:r>
+              <a:t>Connection to robot This is finishing and presentation time, not a new complex mechanism. Each team gets a six-minute robot rehearsal and a four-minute demonstration.</a:t>
+            </a:r>
+          </a:p>
+          <a:p xmlns:a="http://schemas.openxmlformats.org/drawingml/2006/main">
+            <a:r>
+              <a:t/>
+            </a:r>
+          </a:p>
+          <a:p xmlns:a="http://schemas.openxmlformats.org/drawingml/2006/main">
+            <a:r>
+              <a:t>Coaching Ask for an observation before suggesting a change. Help with one connection or edit, then return control. Typing can be assisted; the child still chooses, predicts and starts the run.</a:t>
             </a:r>
           </a:p>
         </p:txBody>
@@ -768,37 +1027,77 @@
           <a:lstStyle xmlns:a="http://schemas.openxmlformats.org/drawingml/2006/main"/>
           <a:p xmlns:a="http://schemas.openxmlformats.org/drawingml/2006/main">
             <a:r>
-              <a:t>Robot and planning rotations. 1. Complete the final four concept questions individually during minutes 0–7. Use the same questions as the baseline without looking at the earlier responses.</a:t>
-            </a:r>
-          </a:p>
-          <a:p xmlns:a="http://schemas.openxmlformats.org/drawingml/2006/main">
-            <a:r>
-              <a:t>2. Use minutes 7–12 for a short welcome and demonstration briefing. From 12–24, each pod splits 12 minutes into two six-minute pair rehearsals. Switch driver after three minutes.</a:t>
-            </a:r>
-          </a:p>
-          <a:p xmlns:a="http://schemas.openxmlformats.org/drawingml/2006/main">
-            <a:r>
-              <a:t>3. At 24–28, save a final copy and arrange the audience safely. Each student rehearses one sentence about the code or evidence.</a:t>
-            </a:r>
-          </a:p>
-          <a:p xmlns:a="http://schemas.openxmlformats.org/drawingml/2006/main">
-            <a:r>
-              <a:t>4. From 28–44, four pairs each get four minutes: 45-second explanation, short run, audience question, and reset. If the run fails, show a stationary sensor reading and explain the next test.</a:t>
-            </a:r>
-          </a:p>
-          <a:p xmlns:a="http://schemas.openxmlformats.org/drawingml/2006/main">
-            <a:r>
-              <a:t>5. At 44–49, celebrate a specific learning example from every pair. At 49–54, explain high school robotics roles and the optional next step. Use 54–60 for pack-up and YMCA pickup.</a:t>
-            </a:r>
-          </a:p>
-          <a:p xmlns:a="http://schemas.openxmlformats.org/drawingml/2006/main">
-            <a:r>
-              <a:t>Off-robot task: While another pair rehearses, trace the final code and prepare an explanation. During demonstrations, write one useful question or observed idea for another pair.</a:t>
-            </a:r>
-          </a:p>
-          <a:p xmlns:a="http://schemas.openxmlformats.org/drawingml/2006/main">
-            <a:r>
-              <a:t>Week 8 schedule: 12–24 rehearsals, 24–28 setup, 28–44 demos. Otherwise 15–27 first pair, 27–39 second pair.</a:t>
+              <a:t>Slide 5 Evidence from our test</a:t>
+            </a:r>
+          </a:p>
+          <a:p xmlns:a="http://schemas.openxmlformats.org/drawingml/2006/main">
+            <a:r>
+              <a:t/>
+            </a:r>
+          </a:p>
+          <a:p xmlns:a="http://schemas.openxmlformats.org/drawingml/2006/main">
+            <a:r>
+              <a:t>Timing 28–44 demonstrations, then 44–50 specific celebrations.</a:t>
+            </a:r>
+          </a:p>
+          <a:p xmlns:a="http://schemas.openxmlformats.org/drawingml/2006/main">
+            <a:r>
+              <a:t/>
+            </a:r>
+          </a:p>
+          <a:p xmlns:a="http://schemas.openxmlformats.org/drawingml/2006/main">
+            <a:r>
+              <a:t>Evidence At the robot: each child makes a prediction and takes a driver turn. Keep one number, tick or short phrase per trial. At the build table: show the model and its hand-test result. Final concept responses, confidence rating, a brief mentor rubric, final recipe, and measured demo outcome. Photos or quotes require the program’s agreed permission process.</a:t>
+            </a:r>
+          </a:p>
+          <a:p xmlns:a="http://schemas.openxmlformats.org/drawingml/2006/main">
+            <a:r>
+              <a:t/>
+            </a:r>
+          </a:p>
+          <a:p xmlns:a="http://schemas.openxmlformats.org/drawingml/2006/main">
+            <a:r>
+              <a:t>Ask What changed? What stayed the same? What did the real run show? Record a tick, short phrase or number at the robot. The build table tests the model by hand rather than repeating a worksheet.</a:t>
+            </a:r>
+          </a:p>
+          <a:p xmlns:a="http://schemas.openxmlformats.org/drawingml/2006/main">
+            <a:r>
+              <a:t/>
+            </a:r>
+          </a:p>
+          <a:p xmlns:a="http://schemas.openxmlformats.org/drawingml/2006/main">
+            <a:r>
+              <a:t>Troubleshooting Connection failure: use the saved recipe and act out the sequence. Sensor failure: show the recorded test log. Keep each team’s four-minute slot and do not replace students’ explanations with a mentor repair session.</a:t>
+            </a:r>
+          </a:p>
+          <a:p xmlns:a="http://schemas.openxmlformats.org/drawingml/2006/main">
+            <a:r>
+              <a:t/>
+            </a:r>
+          </a:p>
+          <a:p xmlns:a="http://schemas.openxmlformats.org/drawingml/2006/main">
+            <a:r>
+              <a:t>Support Allow a partner interview, pointing to code, or a recorded explanation prepared with staff. Participation and honest reasoning count even if the robot does not complete its route.</a:t>
+            </a:r>
+          </a:p>
+          <a:p xmlns:a="http://schemas.openxmlformats.org/drawingml/2006/main">
+            <a:r>
+              <a:t/>
+            </a:r>
+          </a:p>
+          <a:p xmlns:a="http://schemas.openxmlformats.org/drawingml/2006/main">
+            <a:r>
+              <a:t>Extension Explain a limitation and propose a specific next experiment. Invite questions about how the result might change on a different surface.</a:t>
+            </a:r>
+          </a:p>
+          <a:p xmlns:a="http://schemas.openxmlformats.org/drawingml/2006/main">
+            <a:r>
+              <a:t/>
+            </a:r>
+          </a:p>
+          <a:p xmlns:a="http://schemas.openxmlformats.org/drawingml/2006/main">
+            <a:r>
+              <a:t>If needed Reopen the team’s saved Word Blocks mission. Students point out a variable, a repeat, or a decision and connect it to observed robot behavior. No language switch is needed on showcase day.</a:t>
             </a:r>
           </a:p>
         </p:txBody>
@@ -868,102 +1167,67 @@
           <a:lstStyle xmlns:a="http://schemas.openxmlformats.org/drawingml/2006/main"/>
           <a:p xmlns:a="http://schemas.openxmlformats.org/drawingml/2006/main">
             <a:r>
-              <a:t>39–49 minutes for improvement in standard lessons. Final concept responses, confidence rating, a brief mentor rubric, final recipe, and measured demo outcome. Photos or quotes require the program’s agreed permission process.</a:t>
-            </a:r>
-          </a:p>
-          <a:p xmlns:a="http://schemas.openxmlformats.org/drawingml/2006/main">
-            <a:r>
-              <a:t>Troubleshooting: Connection failure: use the saved recipe and act out the sequence. Sensor failure: show the recorded test log. Keep each pair’s four-minute slot and do not replace students’ explanations with a mentor repair session.</a:t>
-            </a:r>
-          </a:p>
-          <a:p xmlns:a="http://schemas.openxmlformats.org/drawingml/2006/main">
-            <a:r>
-              <a:t>Optional extension: Explain a limitation and propose a specific next experiment. Invite questions about how the result might change on a different surface.</a:t>
-            </a:r>
-          </a:p>
-          <a:p xmlns:a="http://schemas.openxmlformats.org/drawingml/2006/main">
-            <a:r>
-              <a:t>If Python becomes a barrier, preserve the concept using this fallback: Reopen the pair’s saved Word Blocks mission. Students point out a variable, a repeat, or a decision and connect it to observed robot behavior. No language switch is needed on showcase day.</a:t>
-            </a:r>
-          </a:p>
-        </p:txBody>
-      </p:sp>
-      <p:sp>
-        <p:nvSpPr>
-          <p:cNvPr id="4" name="Slide Number Placeholder 3"/>
-          <p:cNvSpPr>
-            <a:spLocks xmlns:a="http://schemas.openxmlformats.org/drawingml/2006/main" noGrp="1"/>
-          </p:cNvSpPr>
-          <p:nvPr>
-            <p:ph type="sldNum" idx="5"/>
-          </p:nvPr>
-        </p:nvSpPr>
-        <p:spPr/>
-        <p:txBody>
-          <a:bodyPr xmlns:a="http://schemas.openxmlformats.org/drawingml/2006/main"/>
-          <a:lstStyle xmlns:a="http://schemas.openxmlformats.org/drawingml/2006/main"/>
-          <a:p xmlns:a="http://schemas.openxmlformats.org/drawingml/2006/main"/>
-        </p:txBody>
-      </p:sp>
-    </p:spTree>
-  </p:cSld>
-  <p:clrMapOvr>
-    <a:masterClrMapping xmlns:a="http://schemas.openxmlformats.org/drawingml/2006/main"/>
-  </p:clrMapOvr>
-</p:notes>
-</file>
-
-<file path=ppt/notesSlides/notesSlide7.xml><?xml version="1.0" encoding="utf-8"?>
-<p:notes xmlns:p="http://schemas.openxmlformats.org/presentationml/2006/main">
-  <p:cSld>
-    <p:spTree>
-      <p:nvGrpSpPr>
-        <p:cNvPr id="1" name=""/>
-        <p:cNvGrpSpPr/>
-        <p:nvPr/>
-      </p:nvGrpSpPr>
-      <p:grpSpPr>
-        <a:xfrm xmlns:a="http://schemas.openxmlformats.org/drawingml/2006/main"/>
-      </p:grpSpPr>
-      <p:sp>
-        <p:nvSpPr>
-          <p:cNvPr id="2" name="Slide Image Placeholder 1"/>
-          <p:cNvSpPr>
-            <a:spLocks xmlns:a="http://schemas.openxmlformats.org/drawingml/2006/main" noGrp="1"/>
-          </p:cNvSpPr>
-          <p:nvPr>
-            <p:ph type="sldImg" idx="0"/>
-          </p:nvPr>
-        </p:nvSpPr>
-        <p:spPr/>
-      </p:sp>
-      <p:sp>
-        <p:nvSpPr>
-          <p:cNvPr id="3" name="Notes Placeholder 2"/>
-          <p:cNvSpPr>
-            <a:spLocks xmlns:a="http://schemas.openxmlformats.org/drawingml/2006/main" noGrp="1"/>
-          </p:cNvSpPr>
-          <p:nvPr>
-            <p:ph type="body" idx="1"/>
-          </p:nvPr>
-        </p:nvSpPr>
-        <p:spPr/>
-        <p:txBody>
-          <a:bodyPr xmlns:a="http://schemas.openxmlformats.org/drawingml/2006/main"/>
-          <a:lstStyle xmlns:a="http://schemas.openxmlformats.org/drawingml/2006/main"/>
-          <a:p xmlns:a="http://schemas.openxmlformats.org/drawingml/2006/main">
-            <a:r>
-              <a:t>49–54 minutes: individual explanation. Reserve 54–60 for saving and reset. Use the same baseline key in the instructor guide. Report what actually happened during the demo, not the intended outcome. Future FRC interest is optional and separate from demonstrated learning.</a:t>
-            </a:r>
-          </a:p>
-          <a:p xmlns:a="http://schemas.openxmlformats.org/drawingml/2006/main">
-            <a:r>
-              <a:t>FRC includes programming, design, fabrication, outreach, media, and team operations.</a:t>
-            </a:r>
-          </a:p>
-          <a:p xmlns:a="http://schemas.openxmlformats.org/drawingml/2006/main">
-            <a:r>
-              <a:t>Keep invitations to future activities optional and parent-mediated. Do not equate club attendance with FRC membership.</a:t>
+              <a:t>Slide 6 What we learned and noticed</a:t>
+            </a:r>
+          </a:p>
+          <a:p xmlns:a="http://schemas.openxmlformats.org/drawingml/2006/main">
+            <a:r>
+              <a:t/>
+            </a:r>
+          </a:p>
+          <a:p xmlns:a="http://schemas.openxmlformats.org/drawingml/2006/main">
+            <a:r>
+              <a:t>Timing 50–54 minutes for reflection; 54–60 for saving, packing and pickup.</a:t>
+            </a:r>
+          </a:p>
+          <a:p xmlns:a="http://schemas.openxmlformats.org/drawingml/2006/main">
+            <a:r>
+              <a:t/>
+            </a:r>
+          </a:p>
+          <a:p xmlns:a="http://schemas.openxmlformats.org/drawingml/2006/main">
+            <a:r>
+              <a:t>Ask each child What can you explain or do now? What did you notice in today’s demonstrations? What would you like to build or explore next?</a:t>
+            </a:r>
+          </a:p>
+          <a:p xmlns:a="http://schemas.openxmlformats.org/drawingml/2006/main">
+            <a:r>
+              <a:t/>
+            </a:r>
+          </a:p>
+          <a:p xmlns:a="http://schemas.openxmlformats.org/drawingml/2006/main">
+            <a:r>
+              <a:t>Facilitate Run two pod conversations in parallel. Give each of the six children about 20–30 seconds for one chosen prompt. Invite a concrete observation from the robot or build. Accept pointing, a demonstration or a short sentence.</a:t>
+            </a:r>
+          </a:p>
+          <a:p xmlns:a="http://schemas.openxmlformats.org/drawingml/2006/main">
+            <a:r>
+              <a:t/>
+            </a:r>
+          </a:p>
+          <a:p xmlns:a="http://schemas.openxmlformats.org/drawingml/2006/main">
+            <a:r>
+              <a:t>Listen for Use the same baseline key in the instructor guide. Report what actually happened during the demo, not the intended outcome. Future FRC interest is optional and separate from demonstrated learning.</a:t>
+            </a:r>
+          </a:p>
+          <a:p xmlns:a="http://schemas.openxmlformats.org/drawingml/2006/main">
+            <a:r>
+              <a:t/>
+            </a:r>
+          </a:p>
+          <a:p xmlns:a="http://schemas.openxmlformats.org/drawingml/2006/main">
+            <a:r>
+              <a:t>Close Save T1–T4 projects, stop and park both robots, remove only approved temporary attachments, store four labeled builds and count parts. Follow YMCA pickup procedures.</a:t>
+            </a:r>
+          </a:p>
+          <a:p xmlns:a="http://schemas.openxmlformats.org/drawingml/2006/main">
+            <a:r>
+              <a:t/>
+            </a:r>
+          </a:p>
+          <a:p xmlns:a="http://schemas.openxmlformats.org/drawingml/2006/main">
+            <a:r>
+              <a:t>Optional connection FRC includes programming, design, fabrication, outreach, media, and team operations.</a:t>
             </a:r>
           </a:p>
         </p:txBody>
@@ -1031,7 +1295,7 @@
   </p:cSld>
   <p:clrMap bg1="lt1" tx1="dk1" bg2="lt2" tx2="dk2" accent1="accent1" accent2="accent2" accent3="accent3" accent4="accent4" accent5="accent5" accent6="accent6" hlink="hlink" folHlink="folHlink"/>
   <p:sldLayoutIdLst>
-    <p:sldLayoutId xmlns:r="http://schemas.openxmlformats.org/officeDocument/2006/relationships" id="2147483649" r:id="R2ab54ebc754f48e0"/>
+    <p:sldLayoutId xmlns:r="http://schemas.openxmlformats.org/officeDocument/2006/relationships" id="2147483649" r:id="Rb15c72ba4dde486f"/>
   </p:sldLayoutIdLst>
   <p:txStyles>
     <p:titleStyle>
@@ -1611,6 +1875,7 @@
           <a:lstStyle xmlns:a="http://schemas.openxmlformats.org/drawingml/2006/main"/>
           <a:p xmlns:a="http://schemas.openxmlformats.org/drawingml/2006/main">
             <a:pPr>
+              <a:buNone/>
               <a:defRPr sz="5100" b="1">
                 <a:solidFill>
                   <a:srgbClr val="FFFFFF"/>
@@ -1668,6 +1933,7 @@
           <a:lstStyle xmlns:a="http://schemas.openxmlformats.org/drawingml/2006/main"/>
           <a:p xmlns:a="http://schemas.openxmlformats.org/drawingml/2006/main">
             <a:pPr>
+              <a:buNone/>
               <a:defRPr sz="2475" b="0">
                 <a:solidFill>
                   <a:srgbClr val="9DDADD"/>
@@ -1725,6 +1991,7 @@
           <a:lstStyle xmlns:a="http://schemas.openxmlformats.org/drawingml/2006/main"/>
           <a:p xmlns:a="http://schemas.openxmlformats.org/drawingml/2006/main">
             <a:pPr>
+              <a:buNone/>
               <a:defRPr sz="1425" b="0">
                 <a:solidFill>
                   <a:srgbClr val="B9D4DC"/>
@@ -1811,6 +2078,7 @@
           <a:lstStyle xmlns:a="http://schemas.openxmlformats.org/drawingml/2006/main"/>
           <a:p xmlns:a="http://schemas.openxmlformats.org/drawingml/2006/main">
             <a:pPr>
+              <a:buNone/>
               <a:defRPr sz="3600" b="1">
                 <a:solidFill>
                   <a:srgbClr val="173044"/>
@@ -1868,6 +2136,7 @@
           <a:lstStyle xmlns:a="http://schemas.openxmlformats.org/drawingml/2006/main"/>
           <a:p xmlns:a="http://schemas.openxmlformats.org/drawingml/2006/main">
             <a:pPr>
+              <a:buNone/>
               <a:defRPr sz="2550" b="0">
                 <a:solidFill>
                   <a:srgbClr val="173044"/>
@@ -1925,6 +2194,7 @@
           <a:lstStyle xmlns:a="http://schemas.openxmlformats.org/drawingml/2006/main"/>
           <a:p xmlns:a="http://schemas.openxmlformats.org/drawingml/2006/main">
             <a:pPr>
+              <a:buNone/>
               <a:defRPr sz="2550" b="0">
                 <a:solidFill>
                   <a:srgbClr val="173044"/>
@@ -1982,6 +2252,7 @@
           <a:lstStyle xmlns:a="http://schemas.openxmlformats.org/drawingml/2006/main"/>
           <a:p xmlns:a="http://schemas.openxmlformats.org/drawingml/2006/main">
             <a:pPr>
+              <a:buNone/>
               <a:defRPr sz="2550" b="0">
                 <a:solidFill>
                   <a:srgbClr val="173044"/>
@@ -2001,6 +2272,282 @@
                 <a:cs typeface="Arial"/>
               </a:rPr>
               <a:t>An honest account of the result</a:t>
+            </a:r>
+          </a:p>
+        </p:txBody>
+      </p:sp>
+      <p:sp>
+        <p:nvSpPr>
+          <p:cNvPr id="6" name="">
+            <a:extLst xmlns:a="http://schemas.openxmlformats.org/drawingml/2006/main">
+              <a:ext uri="{FF2B5EF4-FFF2-40B4-BE49-F238E27FC236}">
+                <a16:creationId xmlns:a16="http://schemas.microsoft.com/office/drawing/2014/main" id="{CFC6D797-9D1A-4D42-AD80-4464B3538455}"/>
+              </a:ext>
+            </a:extLst>
+          </p:cNvPr>
+          <p:cNvSpPr>
+            <a:spLocks xmlns:a="http://schemas.openxmlformats.org/drawingml/2006/main" noGrp="1"/>
+          </p:cNvSpPr>
+          <p:nvPr/>
+        </p:nvSpPr>
+        <p:spPr>
+          <a:xfrm xmlns:a="http://schemas.openxmlformats.org/drawingml/2006/main">
+            <a:off x="762000" y="5686425"/>
+            <a:ext cx="3524250" cy="428625"/>
+          </a:xfrm>
+          <a:prstGeom xmlns:a="http://schemas.openxmlformats.org/drawingml/2006/main" prst="rect">
+            <a:avLst/>
+          </a:prstGeom>
+          <a:noFill xmlns:a="http://schemas.openxmlformats.org/drawingml/2006/main"/>
+          <a:ln xmlns:a="http://schemas.openxmlformats.org/drawingml/2006/main" w="0">
+            <a:noFill/>
+          </a:ln>
+        </p:spPr>
+        <p:txBody>
+          <a:bodyPr xmlns:a="http://schemas.openxmlformats.org/drawingml/2006/main">
+            <a:noAutofit/>
+          </a:bodyPr>
+          <a:lstStyle xmlns:a="http://schemas.openxmlformats.org/drawingml/2006/main">
+            <a:defPPr>
+              <a:defRPr sz="1575" b="1">
+                <a:solidFill>
+                  <a:srgbClr val="17713A"/>
+                </a:solidFill>
+                <a:latin typeface="Arial"/>
+                <a:ea typeface="Arial"/>
+                <a:cs typeface="Arial"/>
+              </a:defRPr>
+            </a:defPPr>
+          </a:lstStyle>
+          <a:p xmlns:a="http://schemas.openxmlformats.org/drawingml/2006/main">
+            <a:pPr>
+              <a:buNone/>
+              <a:defRPr sz="1575" b="1">
+                <a:solidFill>
+                  <a:srgbClr val="17713A"/>
+                </a:solidFill>
+                <a:latin typeface="Arial"/>
+                <a:ea typeface="Arial"/>
+                <a:cs typeface="Arial"/>
+              </a:defRPr>
+            </a:pPr>
+            <a:r>
+              <a:rPr sz="1575" b="1">
+                <a:solidFill>
+                  <a:srgbClr val="17713A"/>
+                </a:solidFill>
+                <a:latin typeface="Arial"/>
+                <a:ea typeface="Arial"/>
+                <a:cs typeface="Arial"/>
+              </a:rPr>
+              <a:t>GREEN steady: on</a:t>
+            </a:r>
+          </a:p>
+        </p:txBody>
+      </p:sp>
+      <p:sp>
+        <p:nvSpPr>
+          <p:cNvPr id="7" name="">
+            <a:extLst xmlns:a="http://schemas.openxmlformats.org/drawingml/2006/main">
+              <a:ext uri="{FF2B5EF4-FFF2-40B4-BE49-F238E27FC236}">
+                <a16:creationId xmlns:a16="http://schemas.microsoft.com/office/drawing/2014/main" id="{694F4677-CFAA-405B-8380-2877DF75FE8D}"/>
+              </a:ext>
+            </a:extLst>
+          </p:cNvPr>
+          <p:cNvSpPr>
+            <a:spLocks xmlns:a="http://schemas.openxmlformats.org/drawingml/2006/main" noGrp="1"/>
+          </p:cNvSpPr>
+          <p:nvPr/>
+        </p:nvSpPr>
+        <p:spPr>
+          <a:xfrm xmlns:a="http://schemas.openxmlformats.org/drawingml/2006/main">
+            <a:off x="4381500" y="5686425"/>
+            <a:ext cx="3524250" cy="428625"/>
+          </a:xfrm>
+          <a:prstGeom xmlns:a="http://schemas.openxmlformats.org/drawingml/2006/main" prst="rect">
+            <a:avLst/>
+          </a:prstGeom>
+          <a:noFill xmlns:a="http://schemas.openxmlformats.org/drawingml/2006/main"/>
+          <a:ln xmlns:a="http://schemas.openxmlformats.org/drawingml/2006/main" w="0">
+            <a:noFill/>
+          </a:ln>
+        </p:spPr>
+        <p:txBody>
+          <a:bodyPr xmlns:a="http://schemas.openxmlformats.org/drawingml/2006/main">
+            <a:noAutofit/>
+          </a:bodyPr>
+          <a:lstStyle xmlns:a="http://schemas.openxmlformats.org/drawingml/2006/main">
+            <a:defPPr>
+              <a:defRPr sz="1575" b="1">
+                <a:solidFill>
+                  <a:srgbClr val="915500"/>
+                </a:solidFill>
+                <a:latin typeface="Arial"/>
+                <a:ea typeface="Arial"/>
+                <a:cs typeface="Arial"/>
+              </a:defRPr>
+            </a:defPPr>
+          </a:lstStyle>
+          <a:p xmlns:a="http://schemas.openxmlformats.org/drawingml/2006/main">
+            <a:pPr>
+              <a:buNone/>
+              <a:defRPr sz="1575" b="1">
+                <a:solidFill>
+                  <a:srgbClr val="915500"/>
+                </a:solidFill>
+                <a:latin typeface="Arial"/>
+                <a:ea typeface="Arial"/>
+                <a:cs typeface="Arial"/>
+              </a:defRPr>
+            </a:pPr>
+            <a:r>
+              <a:rPr sz="1575" b="1">
+                <a:solidFill>
+                  <a:srgbClr val="915500"/>
+                </a:solidFill>
+                <a:latin typeface="Arial"/>
+                <a:ea typeface="Arial"/>
+                <a:cs typeface="Arial"/>
+              </a:rPr>
+              <a:t>ORANGE flashing: charge</a:t>
+            </a:r>
+          </a:p>
+        </p:txBody>
+      </p:sp>
+      <p:sp>
+        <p:nvSpPr>
+          <p:cNvPr id="8" name="">
+            <a:extLst xmlns:a="http://schemas.openxmlformats.org/drawingml/2006/main">
+              <a:ext uri="{FF2B5EF4-FFF2-40B4-BE49-F238E27FC236}">
+                <a16:creationId xmlns:a16="http://schemas.microsoft.com/office/drawing/2014/main" id="{02BBB641-335A-4425-980F-F3B24BF985D0}"/>
+              </a:ext>
+            </a:extLst>
+          </p:cNvPr>
+          <p:cNvSpPr>
+            <a:spLocks xmlns:a="http://schemas.openxmlformats.org/drawingml/2006/main" noGrp="1"/>
+          </p:cNvSpPr>
+          <p:nvPr/>
+        </p:nvSpPr>
+        <p:spPr>
+          <a:xfrm xmlns:a="http://schemas.openxmlformats.org/drawingml/2006/main">
+            <a:off x="8001000" y="5686425"/>
+            <a:ext cx="3524250" cy="428625"/>
+          </a:xfrm>
+          <a:prstGeom xmlns:a="http://schemas.openxmlformats.org/drawingml/2006/main" prst="rect">
+            <a:avLst/>
+          </a:prstGeom>
+          <a:noFill xmlns:a="http://schemas.openxmlformats.org/drawingml/2006/main"/>
+          <a:ln xmlns:a="http://schemas.openxmlformats.org/drawingml/2006/main" w="0">
+            <a:noFill/>
+          </a:ln>
+        </p:spPr>
+        <p:txBody>
+          <a:bodyPr xmlns:a="http://schemas.openxmlformats.org/drawingml/2006/main">
+            <a:noAutofit/>
+          </a:bodyPr>
+          <a:lstStyle xmlns:a="http://schemas.openxmlformats.org/drawingml/2006/main">
+            <a:defPPr>
+              <a:defRPr sz="1575" b="1">
+                <a:solidFill>
+                  <a:srgbClr val="B1292D"/>
+                </a:solidFill>
+                <a:latin typeface="Arial"/>
+                <a:ea typeface="Arial"/>
+                <a:cs typeface="Arial"/>
+              </a:defRPr>
+            </a:defPPr>
+          </a:lstStyle>
+          <a:p xmlns:a="http://schemas.openxmlformats.org/drawingml/2006/main">
+            <a:pPr>
+              <a:buNone/>
+              <a:defRPr sz="1575" b="1">
+                <a:solidFill>
+                  <a:srgbClr val="B1292D"/>
+                </a:solidFill>
+                <a:latin typeface="Arial"/>
+                <a:ea typeface="Arial"/>
+                <a:cs typeface="Arial"/>
+              </a:defRPr>
+            </a:pPr>
+            <a:r>
+              <a:rPr sz="1575" b="1">
+                <a:solidFill>
+                  <a:srgbClr val="B1292D"/>
+                </a:solidFill>
+                <a:latin typeface="Arial"/>
+                <a:ea typeface="Arial"/>
+                <a:cs typeface="Arial"/>
+              </a:rPr>
+              <a:t>RED flashing: stop + mentor</a:t>
+            </a:r>
+          </a:p>
+        </p:txBody>
+      </p:sp>
+      <p:sp>
+        <p:nvSpPr>
+          <p:cNvPr id="9" name="">
+            <a:extLst xmlns:a="http://schemas.openxmlformats.org/drawingml/2006/main">
+              <a:ext uri="{FF2B5EF4-FFF2-40B4-BE49-F238E27FC236}">
+                <a16:creationId xmlns:a16="http://schemas.microsoft.com/office/drawing/2014/main" id="{EFF5FC8E-BBA5-4BA2-A9B8-B8A051F7252B}"/>
+              </a:ext>
+            </a:extLst>
+          </p:cNvPr>
+          <p:cNvSpPr>
+            <a:spLocks xmlns:a="http://schemas.openxmlformats.org/drawingml/2006/main" noGrp="1"/>
+          </p:cNvSpPr>
+          <p:nvPr/>
+        </p:nvSpPr>
+        <p:spPr>
+          <a:xfrm xmlns:a="http://schemas.openxmlformats.org/drawingml/2006/main">
+            <a:off x="762000" y="6200775"/>
+            <a:ext cx="10572750" cy="285750"/>
+          </a:xfrm>
+          <a:prstGeom xmlns:a="http://schemas.openxmlformats.org/drawingml/2006/main" prst="rect">
+            <a:avLst/>
+          </a:prstGeom>
+          <a:noFill xmlns:a="http://schemas.openxmlformats.org/drawingml/2006/main"/>
+          <a:ln xmlns:a="http://schemas.openxmlformats.org/drawingml/2006/main" w="0">
+            <a:noFill/>
+          </a:ln>
+        </p:spPr>
+        <p:txBody>
+          <a:bodyPr xmlns:a="http://schemas.openxmlformats.org/drawingml/2006/main">
+            <a:noAutofit/>
+          </a:bodyPr>
+          <a:lstStyle xmlns:a="http://schemas.openxmlformats.org/drawingml/2006/main">
+            <a:defPPr>
+              <a:defRPr sz="1425" b="0">
+                <a:solidFill>
+                  <a:srgbClr val="536A77"/>
+                </a:solidFill>
+                <a:latin typeface="Arial"/>
+                <a:ea typeface="Arial"/>
+                <a:cs typeface="Arial"/>
+              </a:defRPr>
+            </a:defPPr>
+          </a:lstStyle>
+          <a:p xmlns:a="http://schemas.openxmlformats.org/drawingml/2006/main">
+            <a:pPr>
+              <a:buNone/>
+              <a:defRPr sz="1425" b="0">
+                <a:solidFill>
+                  <a:srgbClr val="536A77"/>
+                </a:solidFill>
+                <a:latin typeface="Arial"/>
+                <a:ea typeface="Arial"/>
+                <a:cs typeface="Arial"/>
+              </a:defRPr>
+            </a:pPr>
+            <a:r>
+              <a:rPr sz="1425" b="0">
+                <a:solidFill>
+                  <a:srgbClr val="536A77"/>
+                </a:solidFill>
+                <a:latin typeface="Arial"/>
+                <a:ea typeface="Arial"/>
+                <a:cs typeface="Arial"/>
+              </a:rPr>
+              <a:t>Center button lights. A letter on the display is your program’s output.</a:t>
             </a:r>
           </a:p>
         </p:txBody>
@@ -2065,9 +2612,21 @@
           <a:bodyPr xmlns:a="http://schemas.openxmlformats.org/drawingml/2006/main">
             <a:noAutofit/>
           </a:bodyPr>
-          <a:lstStyle xmlns:a="http://schemas.openxmlformats.org/drawingml/2006/main"/>
+          <a:lstStyle xmlns:a="http://schemas.openxmlformats.org/drawingml/2006/main">
+            <a:defPPr>
+              <a:defRPr sz="3600" b="1">
+                <a:solidFill>
+                  <a:srgbClr val="FFFFFF"/>
+                </a:solidFill>
+                <a:latin typeface="Arial"/>
+                <a:ea typeface="Arial"/>
+                <a:cs typeface="Arial"/>
+              </a:defRPr>
+            </a:defPPr>
+          </a:lstStyle>
           <a:p xmlns:a="http://schemas.openxmlformats.org/drawingml/2006/main">
             <a:pPr>
+              <a:buNone/>
               <a:defRPr sz="3600" b="1">
                 <a:solidFill>
                   <a:srgbClr val="FFFFFF"/>
@@ -2107,8 +2666,8 @@
         </p:nvSpPr>
         <p:spPr>
           <a:xfrm xmlns:a="http://schemas.openxmlformats.org/drawingml/2006/main">
-            <a:off x="781050" y="1952625"/>
-            <a:ext cx="10572750" cy="3429000"/>
+            <a:off x="781050" y="1666875"/>
+            <a:ext cx="10572750" cy="2505075"/>
           </a:xfrm>
           <a:prstGeom xmlns:a="http://schemas.openxmlformats.org/drawingml/2006/main" prst="rect">
             <a:avLst/>
@@ -2122,9 +2681,21 @@
           <a:bodyPr xmlns:a="http://schemas.openxmlformats.org/drawingml/2006/main">
             <a:noAutofit/>
           </a:bodyPr>
-          <a:lstStyle xmlns:a="http://schemas.openxmlformats.org/drawingml/2006/main"/>
+          <a:lstStyle xmlns:a="http://schemas.openxmlformats.org/drawingml/2006/main">
+            <a:defPPr>
+              <a:defRPr sz="2325" b="0">
+                <a:solidFill>
+                  <a:srgbClr val="FFFFFF"/>
+                </a:solidFill>
+                <a:latin typeface="Consolas"/>
+                <a:ea typeface="Consolas"/>
+                <a:cs typeface="Consolas"/>
+              </a:defRPr>
+            </a:defPPr>
+          </a:lstStyle>
           <a:p xmlns:a="http://schemas.openxmlformats.org/drawingml/2006/main">
             <a:pPr>
+              <a:buNone/>
               <a:defRPr sz="2325" b="0">
                 <a:solidFill>
                   <a:srgbClr val="FFFFFF"/>
@@ -2148,6 +2719,7 @@
           </a:p>
           <a:p xmlns:a="http://schemas.openxmlformats.org/drawingml/2006/main">
             <a:pPr>
+              <a:buNone/>
               <a:defRPr sz="2325" b="0">
                 <a:solidFill>
                   <a:srgbClr val="FFFFFF"/>
@@ -2171,6 +2743,7 @@
           </a:p>
           <a:p xmlns:a="http://schemas.openxmlformats.org/drawingml/2006/main">
             <a:pPr>
+              <a:buNone/>
               <a:defRPr sz="2325" b="0">
                 <a:solidFill>
                   <a:srgbClr val="FFFFFF"/>
@@ -2225,9 +2798,21 @@
           <a:bodyPr xmlns:a="http://schemas.openxmlformats.org/drawingml/2006/main">
             <a:noAutofit/>
           </a:bodyPr>
-          <a:lstStyle xmlns:a="http://schemas.openxmlformats.org/drawingml/2006/main"/>
+          <a:lstStyle xmlns:a="http://schemas.openxmlformats.org/drawingml/2006/main">
+            <a:defPPr>
+              <a:defRPr sz="1425" b="0">
+                <a:solidFill>
+                  <a:srgbClr val="B9D4DC"/>
+                </a:solidFill>
+                <a:latin typeface="Arial"/>
+                <a:ea typeface="Arial"/>
+                <a:cs typeface="Arial"/>
+              </a:defRPr>
+            </a:defPPr>
+          </a:lstStyle>
           <a:p xmlns:a="http://schemas.openxmlformats.org/drawingml/2006/main">
             <a:pPr>
+              <a:buNone/>
               <a:defRPr sz="1425" b="0">
                 <a:solidFill>
                   <a:srgbClr val="B9D4DC"/>
@@ -2246,7 +2831,214 @@
                 <a:ea typeface="Arial"/>
                 <a:cs typeface="Arial"/>
               </a:rPr>
-              <a:t>Reading fragment from a complete supplied Python project</a:t>
+              <a:t>Reading fragment from the complete supplied project</a:t>
+            </a:r>
+          </a:p>
+        </p:txBody>
+      </p:sp>
+      <p:sp>
+        <p:nvSpPr>
+          <p:cNvPr id="5" name="">
+            <a:extLst xmlns:a="http://schemas.openxmlformats.org/drawingml/2006/main">
+              <a:ext uri="{FF2B5EF4-FFF2-40B4-BE49-F238E27FC236}">
+                <a16:creationId xmlns:a16="http://schemas.microsoft.com/office/drawing/2014/main" id="{63244B68-0CF7-4DD3-8743-702A9421DE18}"/>
+              </a:ext>
+            </a:extLst>
+          </p:cNvPr>
+          <p:cNvSpPr>
+            <a:spLocks xmlns:a="http://schemas.openxmlformats.org/drawingml/2006/main" noGrp="1"/>
+          </p:cNvSpPr>
+          <p:nvPr/>
+        </p:nvSpPr>
+        <p:spPr>
+          <a:xfrm xmlns:a="http://schemas.openxmlformats.org/drawingml/2006/main">
+            <a:off x="781050" y="4314825"/>
+            <a:ext cx="10572750" cy="381000"/>
+          </a:xfrm>
+          <a:prstGeom xmlns:a="http://schemas.openxmlformats.org/drawingml/2006/main" prst="rect">
+            <a:avLst/>
+          </a:prstGeom>
+          <a:noFill xmlns:a="http://schemas.openxmlformats.org/drawingml/2006/main"/>
+          <a:ln xmlns:a="http://schemas.openxmlformats.org/drawingml/2006/main" w="0">
+            <a:noFill/>
+          </a:ln>
+        </p:spPr>
+        <p:txBody>
+          <a:bodyPr xmlns:a="http://schemas.openxmlformats.org/drawingml/2006/main">
+            <a:noAutofit/>
+          </a:bodyPr>
+          <a:lstStyle xmlns:a="http://schemas.openxmlformats.org/drawingml/2006/main">
+            <a:defPPr>
+              <a:defRPr sz="2100" b="1">
+                <a:solidFill>
+                  <a:srgbClr val="9DDADD"/>
+                </a:solidFill>
+                <a:latin typeface="Arial"/>
+                <a:ea typeface="Arial"/>
+                <a:cs typeface="Arial"/>
+              </a:defRPr>
+            </a:defPPr>
+          </a:lstStyle>
+          <a:p xmlns:a="http://schemas.openxmlformats.org/drawingml/2006/main">
+            <a:pPr>
+              <a:buNone/>
+              <a:defRPr sz="2100" b="1">
+                <a:solidFill>
+                  <a:srgbClr val="9DDADD"/>
+                </a:solidFill>
+                <a:latin typeface="Arial"/>
+                <a:ea typeface="Arial"/>
+                <a:cs typeface="Arial"/>
+              </a:defRPr>
+            </a:pPr>
+            <a:r>
+              <a:rPr sz="2100" b="1">
+                <a:solidFill>
+                  <a:srgbClr val="9DDADD"/>
+                </a:solidFill>
+                <a:latin typeface="Arial"/>
+                <a:ea typeface="Arial"/>
+                <a:cs typeface="Arial"/>
+              </a:rPr>
+              <a:t>Our prediction</a:t>
+            </a:r>
+          </a:p>
+        </p:txBody>
+      </p:sp>
+      <p:sp>
+        <p:nvSpPr>
+          <p:cNvPr id="6" name="">
+            <a:extLst xmlns:a="http://schemas.openxmlformats.org/drawingml/2006/main">
+              <a:ext uri="{FF2B5EF4-FFF2-40B4-BE49-F238E27FC236}">
+                <a16:creationId xmlns:a16="http://schemas.microsoft.com/office/drawing/2014/main" id="{98D38427-20D0-4890-B18A-8CE32F09EB60}"/>
+              </a:ext>
+            </a:extLst>
+          </p:cNvPr>
+          <p:cNvSpPr>
+            <a:spLocks xmlns:a="http://schemas.openxmlformats.org/drawingml/2006/main" noGrp="1"/>
+          </p:cNvSpPr>
+          <p:nvPr/>
+        </p:nvSpPr>
+        <p:spPr>
+          <a:xfrm xmlns:a="http://schemas.openxmlformats.org/drawingml/2006/main">
+            <a:off x="781050" y="4772025"/>
+            <a:ext cx="10572750" cy="571500"/>
+          </a:xfrm>
+          <a:prstGeom xmlns:a="http://schemas.openxmlformats.org/drawingml/2006/main" prst="rect">
+            <a:avLst/>
+          </a:prstGeom>
+          <a:noFill xmlns:a="http://schemas.openxmlformats.org/drawingml/2006/main"/>
+          <a:ln xmlns:a="http://schemas.openxmlformats.org/drawingml/2006/main" w="0">
+            <a:noFill/>
+          </a:ln>
+        </p:spPr>
+        <p:txBody>
+          <a:bodyPr xmlns:a="http://schemas.openxmlformats.org/drawingml/2006/main">
+            <a:noAutofit/>
+          </a:bodyPr>
+          <a:lstStyle xmlns:a="http://schemas.openxmlformats.org/drawingml/2006/main">
+            <a:defPPr>
+              <a:defRPr sz="2025" b="0">
+                <a:solidFill>
+                  <a:srgbClr val="FFFFFF"/>
+                </a:solidFill>
+                <a:latin typeface="Arial"/>
+                <a:ea typeface="Arial"/>
+                <a:cs typeface="Arial"/>
+              </a:defRPr>
+            </a:defPPr>
+          </a:lstStyle>
+          <a:p xmlns:a="http://schemas.openxmlformats.org/drawingml/2006/main">
+            <a:pPr>
+              <a:buNone/>
+              <a:defRPr sz="2025" b="0">
+                <a:solidFill>
+                  <a:srgbClr val="FFFFFF"/>
+                </a:solidFill>
+                <a:latin typeface="Arial"/>
+                <a:ea typeface="Arial"/>
+                <a:cs typeface="Arial"/>
+              </a:defRPr>
+            </a:pPr>
+            <a:r>
+              <a:rPr sz="2025" b="0">
+                <a:solidFill>
+                  <a:srgbClr val="FFFFFF"/>
+                </a:solidFill>
+                <a:latin typeface="Arial"/>
+                <a:ea typeface="Arial"/>
+                <a:cs typeface="Arial"/>
+              </a:rPr>
+              <a:t>What do you expect the program to report?</a:t>
+            </a:r>
+          </a:p>
+        </p:txBody>
+      </p:sp>
+      <p:sp>
+        <p:nvSpPr>
+          <p:cNvPr id="7" name="">
+            <a:extLst xmlns:a="http://schemas.openxmlformats.org/drawingml/2006/main">
+              <a:ext uri="{FF2B5EF4-FFF2-40B4-BE49-F238E27FC236}">
+                <a16:creationId xmlns:a16="http://schemas.microsoft.com/office/drawing/2014/main" id="{0FAEA3F0-4FC6-452C-A5A1-69E06F25ED7E}"/>
+              </a:ext>
+            </a:extLst>
+          </p:cNvPr>
+          <p:cNvSpPr>
+            <a:spLocks xmlns:a="http://schemas.openxmlformats.org/drawingml/2006/main" noGrp="1"/>
+          </p:cNvSpPr>
+          <p:nvPr/>
+        </p:nvSpPr>
+        <p:spPr>
+          <a:xfrm xmlns:a="http://schemas.openxmlformats.org/drawingml/2006/main">
+            <a:off x="781050" y="5400675"/>
+            <a:ext cx="10572750" cy="571500"/>
+          </a:xfrm>
+          <a:prstGeom xmlns:a="http://schemas.openxmlformats.org/drawingml/2006/main" prst="rect">
+            <a:avLst/>
+          </a:prstGeom>
+          <a:noFill xmlns:a="http://schemas.openxmlformats.org/drawingml/2006/main"/>
+          <a:ln xmlns:a="http://schemas.openxmlformats.org/drawingml/2006/main" w="0">
+            <a:noFill/>
+          </a:ln>
+        </p:spPr>
+        <p:txBody>
+          <a:bodyPr xmlns:a="http://schemas.openxmlformats.org/drawingml/2006/main">
+            <a:noAutofit/>
+          </a:bodyPr>
+          <a:lstStyle xmlns:a="http://schemas.openxmlformats.org/drawingml/2006/main">
+            <a:defPPr>
+              <a:defRPr sz="2025" b="0">
+                <a:solidFill>
+                  <a:srgbClr val="FFFFFF"/>
+                </a:solidFill>
+                <a:latin typeface="Arial"/>
+                <a:ea typeface="Arial"/>
+                <a:cs typeface="Arial"/>
+              </a:defRPr>
+            </a:defPPr>
+          </a:lstStyle>
+          <a:p xmlns:a="http://schemas.openxmlformats.org/drawingml/2006/main">
+            <a:pPr>
+              <a:buNone/>
+              <a:defRPr sz="2025" b="0">
+                <a:solidFill>
+                  <a:srgbClr val="FFFFFF"/>
+                </a:solidFill>
+                <a:latin typeface="Arial"/>
+                <a:ea typeface="Arial"/>
+                <a:cs typeface="Arial"/>
+              </a:defRPr>
+            </a:pPr>
+            <a:r>
+              <a:rPr sz="2025" b="0">
+                <a:solidFill>
+                  <a:srgbClr val="FFFFFF"/>
+                </a:solidFill>
+                <a:latin typeface="Arial"/>
+                <a:ea typeface="Arial"/>
+                <a:cs typeface="Arial"/>
+              </a:rPr>
+              <a:t>What evidence can you explain if the run fails?</a:t>
             </a:r>
           </a:p>
         </p:txBody>
@@ -2282,10 +3074,10 @@
       </p:grpSpPr>
       <p:sp>
         <p:nvSpPr>
-          <p:cNvPr id="5" name="">
+          <p:cNvPr id="6" name="">
             <a:extLst xmlns:a="http://schemas.openxmlformats.org/drawingml/2006/main">
               <a:ext uri="{FF2B5EF4-FFF2-40B4-BE49-F238E27FC236}">
-                <a16:creationId xmlns:a16="http://schemas.microsoft.com/office/drawing/2014/main" id="{982E3BED-F296-48F6-B662-6CA0AB3F3A8D}"/>
+                <a16:creationId xmlns:a16="http://schemas.microsoft.com/office/drawing/2014/main" id="{7505C470-5EEE-4825-8081-141824395C63}"/>
               </a:ext>
             </a:extLst>
           </p:cNvPr>
@@ -2311,9 +3103,21 @@
           <a:bodyPr xmlns:a="http://schemas.openxmlformats.org/drawingml/2006/main">
             <a:noAutofit/>
           </a:bodyPr>
-          <a:lstStyle xmlns:a="http://schemas.openxmlformats.org/drawingml/2006/main"/>
+          <a:lstStyle xmlns:a="http://schemas.openxmlformats.org/drawingml/2006/main">
+            <a:defPPr>
+              <a:defRPr sz="3600" b="1">
+                <a:solidFill>
+                  <a:srgbClr val="173044"/>
+                </a:solidFill>
+                <a:latin typeface="Arial"/>
+                <a:ea typeface="Arial"/>
+                <a:cs typeface="Arial"/>
+              </a:defRPr>
+            </a:defPPr>
+          </a:lstStyle>
           <a:p xmlns:a="http://schemas.openxmlformats.org/drawingml/2006/main">
             <a:pPr>
+              <a:buNone/>
               <a:defRPr sz="3600" b="1">
                 <a:solidFill>
                   <a:srgbClr val="173044"/>
@@ -2332,7 +3136,7 @@
                 <a:ea typeface="Arial"/>
                 <a:cs typeface="Arial"/>
               </a:rPr>
-              <a:t>A prediction before the run</a:t>
+              <a:t>Our demonstration order</a:t>
             </a:r>
           </a:p>
         </p:txBody>
@@ -2342,7 +3146,7 @@
           <p:cNvPr id="2" name="">
             <a:extLst xmlns:a="http://schemas.openxmlformats.org/drawingml/2006/main">
               <a:ext uri="{FF2B5EF4-FFF2-40B4-BE49-F238E27FC236}">
-                <a16:creationId xmlns:a16="http://schemas.microsoft.com/office/drawing/2014/main" id="{551EBDE3-687A-4932-86B4-77BE2A0099A6}"/>
+                <a16:creationId xmlns:a16="http://schemas.microsoft.com/office/drawing/2014/main" id="{259E6989-9F0E-49E4-82E2-E94A59120E4D}"/>
               </a:ext>
             </a:extLst>
           </p:cNvPr>
@@ -2353,8 +3157,8 @@
         </p:nvSpPr>
         <p:spPr>
           <a:xfrm xmlns:a="http://schemas.openxmlformats.org/drawingml/2006/main">
-            <a:off x="762000" y="1952625"/>
-            <a:ext cx="10477500" cy="1390650"/>
+            <a:off x="762000" y="1847850"/>
+            <a:ext cx="10572750" cy="809625"/>
           </a:xfrm>
           <a:prstGeom xmlns:a="http://schemas.openxmlformats.org/drawingml/2006/main" prst="rect">
             <a:avLst/>
@@ -2368,10 +3172,22 @@
           <a:bodyPr xmlns:a="http://schemas.openxmlformats.org/drawingml/2006/main">
             <a:noAutofit/>
           </a:bodyPr>
-          <a:lstStyle xmlns:a="http://schemas.openxmlformats.org/drawingml/2006/main"/>
+          <a:lstStyle xmlns:a="http://schemas.openxmlformats.org/drawingml/2006/main">
+            <a:defPPr>
+              <a:defRPr sz="2175" b="0">
+                <a:solidFill>
+                  <a:srgbClr val="173044"/>
+                </a:solidFill>
+                <a:latin typeface="Arial"/>
+                <a:ea typeface="Arial"/>
+                <a:cs typeface="Arial"/>
+              </a:defRPr>
+            </a:defPPr>
+          </a:lstStyle>
           <a:p xmlns:a="http://schemas.openxmlformats.org/drawingml/2006/main">
             <a:pPr>
-              <a:defRPr sz="2625" b="0">
+              <a:buNone/>
+              <a:defRPr sz="2175" b="0">
                 <a:solidFill>
                   <a:srgbClr val="173044"/>
                 </a:solidFill>
@@ -2381,7 +3197,7 @@
               </a:defRPr>
             </a:pPr>
             <a:r>
-              <a:rPr sz="2625" b="0">
+              <a:rPr sz="2175" b="0">
                 <a:solidFill>
                   <a:srgbClr val="173044"/>
                 </a:solidFill>
@@ -2389,7 +3205,7 @@
                 <a:ea typeface="Arial"/>
                 <a:cs typeface="Arial"/>
               </a:rPr>
-              <a:t>What do you expect the program to report?</a:t>
+              <a:t>Each team has four minutes, including reset.</a:t>
             </a:r>
           </a:p>
         </p:txBody>
@@ -2399,7 +3215,7 @@
           <p:cNvPr id="3" name="">
             <a:extLst xmlns:a="http://schemas.openxmlformats.org/drawingml/2006/main">
               <a:ext uri="{FF2B5EF4-FFF2-40B4-BE49-F238E27FC236}">
-                <a16:creationId xmlns:a16="http://schemas.microsoft.com/office/drawing/2014/main" id="{5394CE24-0CB2-43B0-9596-979352630A8C}"/>
+                <a16:creationId xmlns:a16="http://schemas.microsoft.com/office/drawing/2014/main" id="{56D66990-DD58-4C5F-88D3-48B0E527799F}"/>
               </a:ext>
             </a:extLst>
           </p:cNvPr>
@@ -2410,8 +3226,8 @@
         </p:nvSpPr>
         <p:spPr>
           <a:xfrm xmlns:a="http://schemas.openxmlformats.org/drawingml/2006/main">
-            <a:off x="762000" y="3476625"/>
-            <a:ext cx="10477500" cy="1390650"/>
+            <a:off x="762000" y="2781300"/>
+            <a:ext cx="10572750" cy="809625"/>
           </a:xfrm>
           <a:prstGeom xmlns:a="http://schemas.openxmlformats.org/drawingml/2006/main" prst="rect">
             <a:avLst/>
@@ -2425,10 +3241,22 @@
           <a:bodyPr xmlns:a="http://schemas.openxmlformats.org/drawingml/2006/main">
             <a:noAutofit/>
           </a:bodyPr>
-          <a:lstStyle xmlns:a="http://schemas.openxmlformats.org/drawingml/2006/main"/>
+          <a:lstStyle xmlns:a="http://schemas.openxmlformats.org/drawingml/2006/main">
+            <a:defPPr>
+              <a:defRPr sz="2175" b="0">
+                <a:solidFill>
+                  <a:srgbClr val="173044"/>
+                </a:solidFill>
+                <a:latin typeface="Arial"/>
+                <a:ea typeface="Arial"/>
+                <a:cs typeface="Arial"/>
+              </a:defRPr>
+            </a:defPPr>
+          </a:lstStyle>
           <a:p xmlns:a="http://schemas.openxmlformats.org/drawingml/2006/main">
             <a:pPr>
-              <a:defRPr sz="2625" b="0">
+              <a:buNone/>
+              <a:defRPr sz="2175" b="0">
                 <a:solidFill>
                   <a:srgbClr val="173044"/>
                 </a:solidFill>
@@ -2438,7 +3266,7 @@
               </a:defRPr>
             </a:pPr>
             <a:r>
-              <a:rPr sz="2625" b="0">
+              <a:rPr sz="2175" b="0">
                 <a:solidFill>
                   <a:srgbClr val="173044"/>
                 </a:solidFill>
@@ -2446,7 +3274,7 @@
                 <a:ea typeface="Arial"/>
                 <a:cs typeface="Arial"/>
               </a:rPr>
-              <a:t>What evidence can you explain if the run fails?</a:t>
+              <a:t>All three explain one part of the mission.</a:t>
             </a:r>
           </a:p>
         </p:txBody>
@@ -2456,7 +3284,145 @@
           <p:cNvPr id="4" name="">
             <a:extLst xmlns:a="http://schemas.openxmlformats.org/drawingml/2006/main">
               <a:ext uri="{FF2B5EF4-FFF2-40B4-BE49-F238E27FC236}">
-                <a16:creationId xmlns:a16="http://schemas.microsoft.com/office/drawing/2014/main" id="{5595494A-56F1-496F-9206-406E1D46E28F}"/>
+                <a16:creationId xmlns:a16="http://schemas.microsoft.com/office/drawing/2014/main" id="{A9F8A68B-F14E-487E-A503-2BA879DC6340}"/>
+              </a:ext>
+            </a:extLst>
+          </p:cNvPr>
+          <p:cNvSpPr>
+            <a:spLocks xmlns:a="http://schemas.openxmlformats.org/drawingml/2006/main" noGrp="1"/>
+          </p:cNvSpPr>
+          <p:nvPr/>
+        </p:nvSpPr>
+        <p:spPr>
+          <a:xfrm xmlns:a="http://schemas.openxmlformats.org/drawingml/2006/main">
+            <a:off x="762000" y="3714750"/>
+            <a:ext cx="10572750" cy="809625"/>
+          </a:xfrm>
+          <a:prstGeom xmlns:a="http://schemas.openxmlformats.org/drawingml/2006/main" prst="rect">
+            <a:avLst/>
+          </a:prstGeom>
+          <a:noFill xmlns:a="http://schemas.openxmlformats.org/drawingml/2006/main"/>
+          <a:ln xmlns:a="http://schemas.openxmlformats.org/drawingml/2006/main" w="0">
+            <a:noFill/>
+          </a:ln>
+        </p:spPr>
+        <p:txBody>
+          <a:bodyPr xmlns:a="http://schemas.openxmlformats.org/drawingml/2006/main">
+            <a:noAutofit/>
+          </a:bodyPr>
+          <a:lstStyle xmlns:a="http://schemas.openxmlformats.org/drawingml/2006/main">
+            <a:defPPr>
+              <a:defRPr sz="2175" b="0">
+                <a:solidFill>
+                  <a:srgbClr val="173044"/>
+                </a:solidFill>
+                <a:latin typeface="Arial"/>
+                <a:ea typeface="Arial"/>
+                <a:cs typeface="Arial"/>
+              </a:defRPr>
+            </a:defPPr>
+          </a:lstStyle>
+          <a:p xmlns:a="http://schemas.openxmlformats.org/drawingml/2006/main">
+            <a:pPr>
+              <a:buNone/>
+              <a:defRPr sz="2175" b="0">
+                <a:solidFill>
+                  <a:srgbClr val="173044"/>
+                </a:solidFill>
+                <a:latin typeface="Arial"/>
+                <a:ea typeface="Arial"/>
+                <a:cs typeface="Arial"/>
+              </a:defRPr>
+            </a:pPr>
+            <a:r>
+              <a:rPr sz="2175" b="0">
+                <a:solidFill>
+                  <a:srgbClr val="173044"/>
+                </a:solidFill>
+                <a:latin typeface="Arial"/>
+                <a:ea typeface="Arial"/>
+                <a:cs typeface="Arial"/>
+              </a:rPr>
+              <a:t>Run, observe and answer one question.</a:t>
+            </a:r>
+          </a:p>
+        </p:txBody>
+      </p:sp>
+      <p:sp>
+        <p:nvSpPr>
+          <p:cNvPr id="5" name="">
+            <a:extLst xmlns:a="http://schemas.openxmlformats.org/drawingml/2006/main">
+              <a:ext uri="{FF2B5EF4-FFF2-40B4-BE49-F238E27FC236}">
+                <a16:creationId xmlns:a16="http://schemas.microsoft.com/office/drawing/2014/main" id="{A84C6009-1CA1-488C-A70B-63BD390BBA24}"/>
+              </a:ext>
+            </a:extLst>
+          </p:cNvPr>
+          <p:cNvSpPr>
+            <a:spLocks xmlns:a="http://schemas.openxmlformats.org/drawingml/2006/main" noGrp="1"/>
+          </p:cNvSpPr>
+          <p:nvPr/>
+        </p:nvSpPr>
+        <p:spPr>
+          <a:xfrm xmlns:a="http://schemas.openxmlformats.org/drawingml/2006/main">
+            <a:off x="762000" y="4648200"/>
+            <a:ext cx="10572750" cy="809625"/>
+          </a:xfrm>
+          <a:prstGeom xmlns:a="http://schemas.openxmlformats.org/drawingml/2006/main" prst="rect">
+            <a:avLst/>
+          </a:prstGeom>
+          <a:noFill xmlns:a="http://schemas.openxmlformats.org/drawingml/2006/main"/>
+          <a:ln xmlns:a="http://schemas.openxmlformats.org/drawingml/2006/main" w="0">
+            <a:noFill/>
+          </a:ln>
+        </p:spPr>
+        <p:txBody>
+          <a:bodyPr xmlns:a="http://schemas.openxmlformats.org/drawingml/2006/main">
+            <a:noAutofit/>
+          </a:bodyPr>
+          <a:lstStyle xmlns:a="http://schemas.openxmlformats.org/drawingml/2006/main">
+            <a:defPPr>
+              <a:defRPr sz="2175" b="0">
+                <a:solidFill>
+                  <a:srgbClr val="173044"/>
+                </a:solidFill>
+                <a:latin typeface="Arial"/>
+                <a:ea typeface="Arial"/>
+                <a:cs typeface="Arial"/>
+              </a:defRPr>
+            </a:defPPr>
+          </a:lstStyle>
+          <a:p xmlns:a="http://schemas.openxmlformats.org/drawingml/2006/main">
+            <a:pPr>
+              <a:buNone/>
+              <a:defRPr sz="2175" b="0">
+                <a:solidFill>
+                  <a:srgbClr val="173044"/>
+                </a:solidFill>
+                <a:latin typeface="Arial"/>
+                <a:ea typeface="Arial"/>
+                <a:cs typeface="Arial"/>
+              </a:defRPr>
+            </a:pPr>
+            <a:r>
+              <a:rPr sz="2175" b="0">
+                <a:solidFill>
+                  <a:srgbClr val="173044"/>
+                </a:solidFill>
+                <a:latin typeface="Arial"/>
+                <a:ea typeface="Arial"/>
+                <a:cs typeface="Arial"/>
+              </a:rPr>
+              <a:t>Between turns: finish and test your exhibit.</a:t>
+            </a:r>
+          </a:p>
+        </p:txBody>
+      </p:sp>
+      <p:sp>
+        <p:nvSpPr>
+          <p:cNvPr id="7" name="">
+            <a:extLst xmlns:a="http://schemas.openxmlformats.org/drawingml/2006/main">
+              <a:ext uri="{FF2B5EF4-FFF2-40B4-BE49-F238E27FC236}">
+                <a16:creationId xmlns:a16="http://schemas.microsoft.com/office/drawing/2014/main" id="{F1DCCD47-AB92-4E62-8782-6B8B47343AA5}"/>
               </a:ext>
             </a:extLst>
           </p:cNvPr>
@@ -2482,9 +3448,21 @@
           <a:bodyPr xmlns:a="http://schemas.openxmlformats.org/drawingml/2006/main">
             <a:noAutofit/>
           </a:bodyPr>
-          <a:lstStyle xmlns:a="http://schemas.openxmlformats.org/drawingml/2006/main"/>
+          <a:lstStyle xmlns:a="http://schemas.openxmlformats.org/drawingml/2006/main">
+            <a:defPPr>
+              <a:defRPr sz="1425" b="0">
+                <a:solidFill>
+                  <a:srgbClr val="536A77"/>
+                </a:solidFill>
+                <a:latin typeface="Arial"/>
+                <a:ea typeface="Arial"/>
+                <a:cs typeface="Arial"/>
+              </a:defRPr>
+            </a:defPPr>
+          </a:lstStyle>
           <a:p xmlns:a="http://schemas.openxmlformats.org/drawingml/2006/main">
             <a:pPr>
+              <a:buNone/>
               <a:defRPr sz="1425" b="0">
                 <a:solidFill>
                   <a:srgbClr val="536A77"/>
@@ -2503,7 +3481,7 @@
                 <a:ea typeface="Arial"/>
                 <a:cs typeface="Arial"/>
               </a:rPr>
-              <a:t>Both partners explain a prediction before anyone presses Run.</a:t>
+              <a:t>Rehearsal: rotate every 2 minutes.</a:t>
             </a:r>
           </a:p>
         </p:txBody>
@@ -2511,7 +3489,7 @@
     </p:spTree>
     <p:extLst>
       <p:ext uri="{BB962C8B-B14F-4D97-AF65-F5344CB8AC3E}">
-        <p14:creationId xmlns:p14="http://schemas.microsoft.com/office/powerpoint/2010/main" val="510047744"/>
+        <p14:creationId xmlns:p14="http://schemas.microsoft.com/office/powerpoint/2010/main" val="1196900074"/>
       </p:ext>
     </p:extLst>
   </p:cSld>
@@ -2542,7 +3520,7 @@
           <p:cNvPr id="6" name="">
             <a:extLst xmlns:a="http://schemas.openxmlformats.org/drawingml/2006/main">
               <a:ext uri="{FF2B5EF4-FFF2-40B4-BE49-F238E27FC236}">
-                <a16:creationId xmlns:a16="http://schemas.microsoft.com/office/drawing/2014/main" id="{7505C470-5EEE-4825-8081-141824395C63}"/>
+                <a16:creationId xmlns:a16="http://schemas.microsoft.com/office/drawing/2014/main" id="{D87DFF58-F37D-48F2-A81C-57FE658F2584}"/>
               </a:ext>
             </a:extLst>
           </p:cNvPr>
@@ -2571,6 +3549,7 @@
           <a:lstStyle xmlns:a="http://schemas.openxmlformats.org/drawingml/2006/main"/>
           <a:p xmlns:a="http://schemas.openxmlformats.org/drawingml/2006/main">
             <a:pPr>
+              <a:buNone/>
               <a:defRPr sz="3600" b="1">
                 <a:solidFill>
                   <a:srgbClr val="173044"/>
@@ -2589,7 +3568,7 @@
                 <a:ea typeface="Arial"/>
                 <a:cs typeface="Arial"/>
               </a:rPr>
-              <a:t>Our demonstration order</a:t>
+              <a:t>Evidence from our test</a:t>
             </a:r>
           </a:p>
         </p:txBody>
@@ -2599,7 +3578,7 @@
           <p:cNvPr id="2" name="">
             <a:extLst xmlns:a="http://schemas.openxmlformats.org/drawingml/2006/main">
               <a:ext uri="{FF2B5EF4-FFF2-40B4-BE49-F238E27FC236}">
-                <a16:creationId xmlns:a16="http://schemas.microsoft.com/office/drawing/2014/main" id="{259E6989-9F0E-49E4-82E2-E94A59120E4D}"/>
+                <a16:creationId xmlns:a16="http://schemas.microsoft.com/office/drawing/2014/main" id="{002BDDC8-470A-4592-B443-56F18DE3DCAE}"/>
               </a:ext>
             </a:extLst>
           </p:cNvPr>
@@ -2611,7 +3590,7 @@
         <p:spPr>
           <a:xfrm xmlns:a="http://schemas.openxmlformats.org/drawingml/2006/main">
             <a:off x="762000" y="1952625"/>
-            <a:ext cx="10477500" cy="800100"/>
+            <a:ext cx="10477500" cy="762000"/>
           </a:xfrm>
           <a:prstGeom xmlns:a="http://schemas.openxmlformats.org/drawingml/2006/main" prst="rect">
             <a:avLst/>
@@ -2628,7 +3607,8 @@
           <a:lstStyle xmlns:a="http://schemas.openxmlformats.org/drawingml/2006/main"/>
           <a:p xmlns:a="http://schemas.openxmlformats.org/drawingml/2006/main">
             <a:pPr>
-              <a:defRPr sz="2250" b="0">
+              <a:buNone/>
+              <a:defRPr sz="2400" b="0">
                 <a:solidFill>
                   <a:srgbClr val="173044"/>
                 </a:solidFill>
@@ -2638,7 +3618,7 @@
               </a:defRPr>
             </a:pPr>
             <a:r>
-              <a:rPr sz="2250" b="0">
+              <a:rPr sz="2400" b="0">
                 <a:solidFill>
                   <a:srgbClr val="173044"/>
                 </a:solidFill>
@@ -2646,7 +3626,7 @@
                 <a:ea typeface="Arial"/>
                 <a:cs typeface="Arial"/>
               </a:rPr>
-              <a:t>Each pair gets four minutes.</a:t>
+              <a:t>We changed ____________________.</a:t>
             </a:r>
           </a:p>
         </p:txBody>
@@ -2656,7 +3636,7 @@
           <p:cNvPr id="3" name="">
             <a:extLst xmlns:a="http://schemas.openxmlformats.org/drawingml/2006/main">
               <a:ext uri="{FF2B5EF4-FFF2-40B4-BE49-F238E27FC236}">
-                <a16:creationId xmlns:a16="http://schemas.microsoft.com/office/drawing/2014/main" id="{56D66990-DD58-4C5F-88D3-48B0E527799F}"/>
+                <a16:creationId xmlns:a16="http://schemas.microsoft.com/office/drawing/2014/main" id="{DDD26513-0AD0-4970-AAFB-81EFD06C92E9}"/>
               </a:ext>
             </a:extLst>
           </p:cNvPr>
@@ -2667,8 +3647,8 @@
         </p:nvSpPr>
         <p:spPr>
           <a:xfrm xmlns:a="http://schemas.openxmlformats.org/drawingml/2006/main">
-            <a:off x="762000" y="2886075"/>
-            <a:ext cx="10477500" cy="800100"/>
+            <a:off x="762000" y="2847975"/>
+            <a:ext cx="10477500" cy="762000"/>
           </a:xfrm>
           <a:prstGeom xmlns:a="http://schemas.openxmlformats.org/drawingml/2006/main" prst="rect">
             <a:avLst/>
@@ -2685,7 +3665,8 @@
           <a:lstStyle xmlns:a="http://schemas.openxmlformats.org/drawingml/2006/main"/>
           <a:p xmlns:a="http://schemas.openxmlformats.org/drawingml/2006/main">
             <a:pPr>
-              <a:defRPr sz="2250" b="0">
+              <a:buNone/>
+              <a:defRPr sz="2400" b="0">
                 <a:solidFill>
                   <a:srgbClr val="173044"/>
                 </a:solidFill>
@@ -2695,7 +3676,7 @@
               </a:defRPr>
             </a:pPr>
             <a:r>
-              <a:rPr sz="2250" b="0">
+              <a:rPr sz="2400" b="0">
                 <a:solidFill>
                   <a:srgbClr val="173044"/>
                 </a:solidFill>
@@ -2703,7 +3684,7 @@
                 <a:ea typeface="Arial"/>
                 <a:cs typeface="Arial"/>
               </a:rPr>
-              <a:t>Explain your user and program decision.</a:t>
+              <a:t>We predicted ____________________.</a:t>
             </a:r>
           </a:p>
         </p:txBody>
@@ -2713,7 +3694,7 @@
           <p:cNvPr id="4" name="">
             <a:extLst xmlns:a="http://schemas.openxmlformats.org/drawingml/2006/main">
               <a:ext uri="{FF2B5EF4-FFF2-40B4-BE49-F238E27FC236}">
-                <a16:creationId xmlns:a16="http://schemas.microsoft.com/office/drawing/2014/main" id="{A9F8A68B-F14E-487E-A503-2BA879DC6340}"/>
+                <a16:creationId xmlns:a16="http://schemas.microsoft.com/office/drawing/2014/main" id="{32E1EFD3-8FD3-4C82-91A4-25B2750D48FD}"/>
               </a:ext>
             </a:extLst>
           </p:cNvPr>
@@ -2724,8 +3705,8 @@
         </p:nvSpPr>
         <p:spPr>
           <a:xfrm xmlns:a="http://schemas.openxmlformats.org/drawingml/2006/main">
-            <a:off x="762000" y="3819525"/>
-            <a:ext cx="10477500" cy="800100"/>
+            <a:off x="762000" y="3743325"/>
+            <a:ext cx="10477500" cy="762000"/>
           </a:xfrm>
           <a:prstGeom xmlns:a="http://schemas.openxmlformats.org/drawingml/2006/main" prst="rect">
             <a:avLst/>
@@ -2742,7 +3723,8 @@
           <a:lstStyle xmlns:a="http://schemas.openxmlformats.org/drawingml/2006/main"/>
           <a:p xmlns:a="http://schemas.openxmlformats.org/drawingml/2006/main">
             <a:pPr>
-              <a:defRPr sz="2250" b="0">
+              <a:buNone/>
+              <a:defRPr sz="2400" b="0">
                 <a:solidFill>
                   <a:srgbClr val="173044"/>
                 </a:solidFill>
@@ -2752,7 +3734,7 @@
               </a:defRPr>
             </a:pPr>
             <a:r>
-              <a:rPr sz="2250" b="0">
+              <a:rPr sz="2400" b="0">
                 <a:solidFill>
                   <a:srgbClr val="173044"/>
                 </a:solidFill>
@@ -2760,7 +3742,7 @@
                 <a:ea typeface="Arial"/>
                 <a:cs typeface="Arial"/>
               </a:rPr>
-              <a:t>Run, describe the result, and answer one question.</a:t>
+              <a:t>We observed ____________________.</a:t>
             </a:r>
           </a:p>
         </p:txBody>
@@ -2770,7 +3752,7 @@
           <p:cNvPr id="5" name="">
             <a:extLst xmlns:a="http://schemas.openxmlformats.org/drawingml/2006/main">
               <a:ext uri="{FF2B5EF4-FFF2-40B4-BE49-F238E27FC236}">
-                <a16:creationId xmlns:a16="http://schemas.microsoft.com/office/drawing/2014/main" id="{A84C6009-1CA1-488C-A70B-63BD390BBA24}"/>
+                <a16:creationId xmlns:a16="http://schemas.microsoft.com/office/drawing/2014/main" id="{A4FB9973-7C93-4307-84D8-F2C959FF85EA}"/>
               </a:ext>
             </a:extLst>
           </p:cNvPr>
@@ -2781,8 +3763,8 @@
         </p:nvSpPr>
         <p:spPr>
           <a:xfrm xmlns:a="http://schemas.openxmlformats.org/drawingml/2006/main">
-            <a:off x="762000" y="4752975"/>
-            <a:ext cx="10477500" cy="800100"/>
+            <a:off x="762000" y="4638675"/>
+            <a:ext cx="10477500" cy="762000"/>
           </a:xfrm>
           <a:prstGeom xmlns:a="http://schemas.openxmlformats.org/drawingml/2006/main" prst="rect">
             <a:avLst/>
@@ -2799,7 +3781,8 @@
           <a:lstStyle xmlns:a="http://schemas.openxmlformats.org/drawingml/2006/main"/>
           <a:p xmlns:a="http://schemas.openxmlformats.org/drawingml/2006/main">
             <a:pPr>
-              <a:defRPr sz="2250" b="0">
+              <a:buNone/>
+              <a:defRPr sz="2400" b="0">
                 <a:solidFill>
                   <a:srgbClr val="173044"/>
                 </a:solidFill>
@@ -2809,7 +3792,7 @@
               </a:defRPr>
             </a:pPr>
             <a:r>
-              <a:rPr sz="2250" b="0">
+              <a:rPr sz="2400" b="0">
                 <a:solidFill>
                   <a:srgbClr val="173044"/>
                 </a:solidFill>
@@ -2817,7 +3800,7 @@
                 <a:ea typeface="Arial"/>
                 <a:cs typeface="Arial"/>
               </a:rPr>
-              <a:t>The next pair resets the lane.</a:t>
+              <a:t>Our next test would ____________________.</a:t>
             </a:r>
           </a:p>
         </p:txBody>
@@ -2825,7 +3808,7 @@
     </p:spTree>
     <p:extLst>
       <p:ext uri="{BB962C8B-B14F-4D97-AF65-F5344CB8AC3E}">
-        <p14:creationId xmlns:p14="http://schemas.microsoft.com/office/powerpoint/2010/main" val="1196900074"/>
+        <p14:creationId xmlns:p14="http://schemas.microsoft.com/office/powerpoint/2010/main" val="625815288"/>
       </p:ext>
     </p:extLst>
   </p:cSld>
@@ -2853,10 +3836,10 @@
       </p:grpSpPr>
       <p:sp>
         <p:nvSpPr>
-          <p:cNvPr id="6" name="">
+          <p:cNvPr id="5" name="">
             <a:extLst xmlns:a="http://schemas.openxmlformats.org/drawingml/2006/main">
               <a:ext uri="{FF2B5EF4-FFF2-40B4-BE49-F238E27FC236}">
-                <a16:creationId xmlns:a16="http://schemas.microsoft.com/office/drawing/2014/main" id="{D87DFF58-F37D-48F2-A81C-57FE658F2584}"/>
+                <a16:creationId xmlns:a16="http://schemas.microsoft.com/office/drawing/2014/main" id="{30F5711C-3DF5-40B7-97B2-271000008AA6}"/>
               </a:ext>
             </a:extLst>
           </p:cNvPr>
@@ -2882,9 +3865,21 @@
           <a:bodyPr xmlns:a="http://schemas.openxmlformats.org/drawingml/2006/main">
             <a:noAutofit/>
           </a:bodyPr>
-          <a:lstStyle xmlns:a="http://schemas.openxmlformats.org/drawingml/2006/main"/>
+          <a:lstStyle xmlns:a="http://schemas.openxmlformats.org/drawingml/2006/main">
+            <a:defPPr>
+              <a:defRPr sz="3600" b="1">
+                <a:solidFill>
+                  <a:srgbClr val="173044"/>
+                </a:solidFill>
+                <a:latin typeface="Arial"/>
+                <a:ea typeface="Arial"/>
+                <a:cs typeface="Arial"/>
+              </a:defRPr>
+            </a:defPPr>
+          </a:lstStyle>
           <a:p xmlns:a="http://schemas.openxmlformats.org/drawingml/2006/main">
             <a:pPr>
+              <a:buNone/>
               <a:defRPr sz="3600" b="1">
                 <a:solidFill>
                   <a:srgbClr val="173044"/>
@@ -2903,7 +3898,7 @@
                 <a:ea typeface="Arial"/>
                 <a:cs typeface="Arial"/>
               </a:rPr>
-              <a:t>Evidence from our test</a:t>
+              <a:t>What we learned and noticed</a:t>
             </a:r>
           </a:p>
         </p:txBody>
@@ -2913,7 +3908,7 @@
           <p:cNvPr id="2" name="">
             <a:extLst xmlns:a="http://schemas.openxmlformats.org/drawingml/2006/main">
               <a:ext uri="{FF2B5EF4-FFF2-40B4-BE49-F238E27FC236}">
-                <a16:creationId xmlns:a16="http://schemas.microsoft.com/office/drawing/2014/main" id="{002BDDC8-470A-4592-B443-56F18DE3DCAE}"/>
+                <a16:creationId xmlns:a16="http://schemas.microsoft.com/office/drawing/2014/main" id="{152FB544-024D-4AA5-8119-3EBAEA00BF22}"/>
               </a:ext>
             </a:extLst>
           </p:cNvPr>
@@ -2924,8 +3919,8 @@
         </p:nvSpPr>
         <p:spPr>
           <a:xfrm xmlns:a="http://schemas.openxmlformats.org/drawingml/2006/main">
-            <a:off x="762000" y="1952625"/>
-            <a:ext cx="10477500" cy="762000"/>
+            <a:off x="762000" y="1743075"/>
+            <a:ext cx="10572750" cy="952500"/>
           </a:xfrm>
           <a:prstGeom xmlns:a="http://schemas.openxmlformats.org/drawingml/2006/main" prst="rect">
             <a:avLst/>
@@ -2939,10 +3934,22 @@
           <a:bodyPr xmlns:a="http://schemas.openxmlformats.org/drawingml/2006/main">
             <a:noAutofit/>
           </a:bodyPr>
-          <a:lstStyle xmlns:a="http://schemas.openxmlformats.org/drawingml/2006/main"/>
+          <a:lstStyle xmlns:a="http://schemas.openxmlformats.org/drawingml/2006/main">
+            <a:defPPr>
+              <a:defRPr sz="2550" b="0">
+                <a:solidFill>
+                  <a:srgbClr val="173044"/>
+                </a:solidFill>
+                <a:latin typeface="Arial"/>
+                <a:ea typeface="Arial"/>
+                <a:cs typeface="Arial"/>
+              </a:defRPr>
+            </a:defPPr>
+          </a:lstStyle>
           <a:p xmlns:a="http://schemas.openxmlformats.org/drawingml/2006/main">
             <a:pPr>
-              <a:defRPr sz="2400" b="0">
+              <a:buNone/>
+              <a:defRPr sz="2550" b="0">
                 <a:solidFill>
                   <a:srgbClr val="173044"/>
                 </a:solidFill>
@@ -2952,7 +3959,7 @@
               </a:defRPr>
             </a:pPr>
             <a:r>
-              <a:rPr sz="2400" b="0">
+              <a:rPr sz="2550" b="0">
                 <a:solidFill>
                   <a:srgbClr val="173044"/>
                 </a:solidFill>
@@ -2960,7 +3967,7 @@
                 <a:ea typeface="Arial"/>
                 <a:cs typeface="Arial"/>
               </a:rPr>
-              <a:t>We changed ____________________.</a:t>
+              <a:t>What can you explain or do now?</a:t>
             </a:r>
           </a:p>
         </p:txBody>
@@ -2970,7 +3977,7 @@
           <p:cNvPr id="3" name="">
             <a:extLst xmlns:a="http://schemas.openxmlformats.org/drawingml/2006/main">
               <a:ext uri="{FF2B5EF4-FFF2-40B4-BE49-F238E27FC236}">
-                <a16:creationId xmlns:a16="http://schemas.microsoft.com/office/drawing/2014/main" id="{DDD26513-0AD0-4970-AAFB-81EFD06C92E9}"/>
+                <a16:creationId xmlns:a16="http://schemas.microsoft.com/office/drawing/2014/main" id="{1757C5D9-27DC-427D-ACB6-7C3B43EDE640}"/>
               </a:ext>
             </a:extLst>
           </p:cNvPr>
@@ -2981,8 +3988,8 @@
         </p:nvSpPr>
         <p:spPr>
           <a:xfrm xmlns:a="http://schemas.openxmlformats.org/drawingml/2006/main">
-            <a:off x="762000" y="2847975"/>
-            <a:ext cx="10477500" cy="762000"/>
+            <a:off x="762000" y="2886075"/>
+            <a:ext cx="10572750" cy="952500"/>
           </a:xfrm>
           <a:prstGeom xmlns:a="http://schemas.openxmlformats.org/drawingml/2006/main" prst="rect">
             <a:avLst/>
@@ -2996,10 +4003,22 @@
           <a:bodyPr xmlns:a="http://schemas.openxmlformats.org/drawingml/2006/main">
             <a:noAutofit/>
           </a:bodyPr>
-          <a:lstStyle xmlns:a="http://schemas.openxmlformats.org/drawingml/2006/main"/>
+          <a:lstStyle xmlns:a="http://schemas.openxmlformats.org/drawingml/2006/main">
+            <a:defPPr>
+              <a:defRPr sz="2550" b="0">
+                <a:solidFill>
+                  <a:srgbClr val="173044"/>
+                </a:solidFill>
+                <a:latin typeface="Arial"/>
+                <a:ea typeface="Arial"/>
+                <a:cs typeface="Arial"/>
+              </a:defRPr>
+            </a:defPPr>
+          </a:lstStyle>
           <a:p xmlns:a="http://schemas.openxmlformats.org/drawingml/2006/main">
             <a:pPr>
-              <a:defRPr sz="2400" b="0">
+              <a:buNone/>
+              <a:defRPr sz="2550" b="0">
                 <a:solidFill>
                   <a:srgbClr val="173044"/>
                 </a:solidFill>
@@ -3009,7 +4028,7 @@
               </a:defRPr>
             </a:pPr>
             <a:r>
-              <a:rPr sz="2400" b="0">
+              <a:rPr sz="2550" b="0">
                 <a:solidFill>
                   <a:srgbClr val="173044"/>
                 </a:solidFill>
@@ -3017,7 +4036,7 @@
                 <a:ea typeface="Arial"/>
                 <a:cs typeface="Arial"/>
               </a:rPr>
-              <a:t>We predicted ____________________.</a:t>
+              <a:t>What did you notice in today’s demonstrations?</a:t>
             </a:r>
           </a:p>
         </p:txBody>
@@ -3027,7 +4046,7 @@
           <p:cNvPr id="4" name="">
             <a:extLst xmlns:a="http://schemas.openxmlformats.org/drawingml/2006/main">
               <a:ext uri="{FF2B5EF4-FFF2-40B4-BE49-F238E27FC236}">
-                <a16:creationId xmlns:a16="http://schemas.microsoft.com/office/drawing/2014/main" id="{32E1EFD3-8FD3-4C82-91A4-25B2750D48FD}"/>
+                <a16:creationId xmlns:a16="http://schemas.microsoft.com/office/drawing/2014/main" id="{D7778779-C43F-4BFA-89FA-E97AA9FBF252}"/>
               </a:ext>
             </a:extLst>
           </p:cNvPr>
@@ -3038,8 +4057,8 @@
         </p:nvSpPr>
         <p:spPr>
           <a:xfrm xmlns:a="http://schemas.openxmlformats.org/drawingml/2006/main">
-            <a:off x="762000" y="3743325"/>
-            <a:ext cx="10477500" cy="762000"/>
+            <a:off x="762000" y="4029075"/>
+            <a:ext cx="10572750" cy="952500"/>
           </a:xfrm>
           <a:prstGeom xmlns:a="http://schemas.openxmlformats.org/drawingml/2006/main" prst="rect">
             <a:avLst/>
@@ -3053,10 +4072,22 @@
           <a:bodyPr xmlns:a="http://schemas.openxmlformats.org/drawingml/2006/main">
             <a:noAutofit/>
           </a:bodyPr>
-          <a:lstStyle xmlns:a="http://schemas.openxmlformats.org/drawingml/2006/main"/>
+          <a:lstStyle xmlns:a="http://schemas.openxmlformats.org/drawingml/2006/main">
+            <a:defPPr>
+              <a:defRPr sz="2550" b="0">
+                <a:solidFill>
+                  <a:srgbClr val="173044"/>
+                </a:solidFill>
+                <a:latin typeface="Arial"/>
+                <a:ea typeface="Arial"/>
+                <a:cs typeface="Arial"/>
+              </a:defRPr>
+            </a:defPPr>
+          </a:lstStyle>
           <a:p xmlns:a="http://schemas.openxmlformats.org/drawingml/2006/main">
             <a:pPr>
-              <a:defRPr sz="2400" b="0">
+              <a:buNone/>
+              <a:defRPr sz="2550" b="0">
                 <a:solidFill>
                   <a:srgbClr val="173044"/>
                 </a:solidFill>
@@ -3066,7 +4097,7 @@
               </a:defRPr>
             </a:pPr>
             <a:r>
-              <a:rPr sz="2400" b="0">
+              <a:rPr sz="2550" b="0">
                 <a:solidFill>
                   <a:srgbClr val="173044"/>
                 </a:solidFill>
@@ -3074,17 +4105,17 @@
                 <a:ea typeface="Arial"/>
                 <a:cs typeface="Arial"/>
               </a:rPr>
-              <a:t>We observed ____________________.</a:t>
-            </a:r>
-          </a:p>
-        </p:txBody>
-      </p:sp>
-      <p:sp>
-        <p:nvSpPr>
-          <p:cNvPr id="5" name="">
+              <a:t>What would you like to build or explore next?</a:t>
+            </a:r>
+          </a:p>
+        </p:txBody>
+      </p:sp>
+      <p:sp>
+        <p:nvSpPr>
+          <p:cNvPr id="6" name="">
             <a:extLst xmlns:a="http://schemas.openxmlformats.org/drawingml/2006/main">
               <a:ext uri="{FF2B5EF4-FFF2-40B4-BE49-F238E27FC236}">
-                <a16:creationId xmlns:a16="http://schemas.microsoft.com/office/drawing/2014/main" id="{A4FB9973-7C93-4307-84D8-F2C959FF85EA}"/>
+                <a16:creationId xmlns:a16="http://schemas.microsoft.com/office/drawing/2014/main" id="{BA2321DA-20C4-4025-978A-0E79CFC6867D}"/>
               </a:ext>
             </a:extLst>
           </p:cNvPr>
@@ -3095,8 +4126,8 @@
         </p:nvSpPr>
         <p:spPr>
           <a:xfrm xmlns:a="http://schemas.openxmlformats.org/drawingml/2006/main">
-            <a:off x="762000" y="4638675"/>
-            <a:ext cx="10477500" cy="762000"/>
+            <a:off x="762000" y="5715000"/>
+            <a:ext cx="10572750" cy="666750"/>
           </a:xfrm>
           <a:prstGeom xmlns:a="http://schemas.openxmlformats.org/drawingml/2006/main" prst="rect">
             <a:avLst/>
@@ -3110,12 +4141,24 @@
           <a:bodyPr xmlns:a="http://schemas.openxmlformats.org/drawingml/2006/main">
             <a:noAutofit/>
           </a:bodyPr>
-          <a:lstStyle xmlns:a="http://schemas.openxmlformats.org/drawingml/2006/main"/>
+          <a:lstStyle xmlns:a="http://schemas.openxmlformats.org/drawingml/2006/main">
+            <a:defPPr>
+              <a:defRPr sz="2025" b="0">
+                <a:solidFill>
+                  <a:srgbClr val="006E75"/>
+                </a:solidFill>
+                <a:latin typeface="Arial"/>
+                <a:ea typeface="Arial"/>
+                <a:cs typeface="Arial"/>
+              </a:defRPr>
+            </a:defPPr>
+          </a:lstStyle>
           <a:p xmlns:a="http://schemas.openxmlformats.org/drawingml/2006/main">
             <a:pPr>
-              <a:defRPr sz="2400" b="0">
-                <a:solidFill>
-                  <a:srgbClr val="173044"/>
+              <a:buNone/>
+              <a:defRPr sz="2025" b="0">
+                <a:solidFill>
+                  <a:srgbClr val="006E75"/>
                 </a:solidFill>
                 <a:latin typeface="Arial"/>
                 <a:ea typeface="Arial"/>
@@ -3123,272 +4166,15 @@
               </a:defRPr>
             </a:pPr>
             <a:r>
-              <a:rPr sz="2400" b="0">
-                <a:solidFill>
-                  <a:srgbClr val="173044"/>
+              <a:rPr sz="2025" b="0">
+                <a:solidFill>
+                  <a:srgbClr val="006E75"/>
                 </a:solidFill>
                 <a:latin typeface="Arial"/>
                 <a:ea typeface="Arial"/>
                 <a:cs typeface="Arial"/>
               </a:rPr>
-              <a:t>Our next test would ____________________.</a:t>
-            </a:r>
-          </a:p>
-        </p:txBody>
-      </p:sp>
-    </p:spTree>
-    <p:extLst>
-      <p:ext uri="{BB962C8B-B14F-4D97-AF65-F5344CB8AC3E}">
-        <p14:creationId xmlns:p14="http://schemas.microsoft.com/office/powerpoint/2010/main" val="625815288"/>
-      </p:ext>
-    </p:extLst>
-  </p:cSld>
-</p:sld>
-</file>
-
-<file path=ppt/slides/slide7.xml><?xml version="1.0" encoding="utf-8"?>
-<p:sld xmlns:p="http://schemas.openxmlformats.org/presentationml/2006/main">
-  <p:cSld>
-    <p:bg>
-      <p:bgPr>
-        <a:solidFill xmlns:a="http://schemas.openxmlformats.org/drawingml/2006/main">
-          <a:srgbClr val="FBFAF6"/>
-        </a:solidFill>
-      </p:bgPr>
-    </p:bg>
-    <p:spTree>
-      <p:nvGrpSpPr>
-        <p:cNvPr id="1" name=""/>
-        <p:cNvGrpSpPr/>
-        <p:nvPr/>
-      </p:nvGrpSpPr>
-      <p:grpSpPr>
-        <a:xfrm xmlns:a="http://schemas.openxmlformats.org/drawingml/2006/main"/>
-      </p:grpSpPr>
-      <p:sp>
-        <p:nvSpPr>
-          <p:cNvPr id="5" name="">
-            <a:extLst xmlns:a="http://schemas.openxmlformats.org/drawingml/2006/main">
-              <a:ext uri="{FF2B5EF4-FFF2-40B4-BE49-F238E27FC236}">
-                <a16:creationId xmlns:a16="http://schemas.microsoft.com/office/drawing/2014/main" id="{30F5711C-3DF5-40B7-97B2-271000008AA6}"/>
-              </a:ext>
-            </a:extLst>
-          </p:cNvPr>
-          <p:cNvSpPr>
-            <a:spLocks xmlns:a="http://schemas.openxmlformats.org/drawingml/2006/main" noGrp="1"/>
-          </p:cNvSpPr>
-          <p:nvPr/>
-        </p:nvSpPr>
-        <p:spPr>
-          <a:xfrm xmlns:a="http://schemas.openxmlformats.org/drawingml/2006/main">
-            <a:off x="685800" y="457200"/>
-            <a:ext cx="10820400" cy="1066800"/>
-          </a:xfrm>
-          <a:prstGeom xmlns:a="http://schemas.openxmlformats.org/drawingml/2006/main" prst="rect">
-            <a:avLst/>
-          </a:prstGeom>
-          <a:noFill xmlns:a="http://schemas.openxmlformats.org/drawingml/2006/main"/>
-          <a:ln xmlns:a="http://schemas.openxmlformats.org/drawingml/2006/main" w="0">
-            <a:noFill/>
-          </a:ln>
-        </p:spPr>
-        <p:txBody>
-          <a:bodyPr xmlns:a="http://schemas.openxmlformats.org/drawingml/2006/main">
-            <a:noAutofit/>
-          </a:bodyPr>
-          <a:lstStyle xmlns:a="http://schemas.openxmlformats.org/drawingml/2006/main"/>
-          <a:p xmlns:a="http://schemas.openxmlformats.org/drawingml/2006/main">
-            <a:pPr>
-              <a:defRPr sz="3600" b="1">
-                <a:solidFill>
-                  <a:srgbClr val="173044"/>
-                </a:solidFill>
-                <a:latin typeface="Arial"/>
-                <a:ea typeface="Arial"/>
-                <a:cs typeface="Arial"/>
-              </a:defRPr>
-            </a:pPr>
-            <a:r>
-              <a:rPr sz="3600" b="1">
-                <a:solidFill>
-                  <a:srgbClr val="173044"/>
-                </a:solidFill>
-                <a:latin typeface="Arial"/>
-                <a:ea typeface="Arial"/>
-                <a:cs typeface="Arial"/>
-              </a:rPr>
-              <a:t>What you can explain now</a:t>
-            </a:r>
-          </a:p>
-        </p:txBody>
-      </p:sp>
-      <p:sp>
-        <p:nvSpPr>
-          <p:cNvPr id="2" name="">
-            <a:extLst xmlns:a="http://schemas.openxmlformats.org/drawingml/2006/main">
-              <a:ext uri="{FF2B5EF4-FFF2-40B4-BE49-F238E27FC236}">
-                <a16:creationId xmlns:a16="http://schemas.microsoft.com/office/drawing/2014/main" id="{152FB544-024D-4AA5-8119-3EBAEA00BF22}"/>
-              </a:ext>
-            </a:extLst>
-          </p:cNvPr>
-          <p:cNvSpPr>
-            <a:spLocks xmlns:a="http://schemas.openxmlformats.org/drawingml/2006/main" noGrp="1"/>
-          </p:cNvSpPr>
-          <p:nvPr/>
-        </p:nvSpPr>
-        <p:spPr>
-          <a:xfrm xmlns:a="http://schemas.openxmlformats.org/drawingml/2006/main">
-            <a:off x="762000" y="1857375"/>
-            <a:ext cx="10477500" cy="2286000"/>
-          </a:xfrm>
-          <a:prstGeom xmlns:a="http://schemas.openxmlformats.org/drawingml/2006/main" prst="rect">
-            <a:avLst/>
-          </a:prstGeom>
-          <a:noFill xmlns:a="http://schemas.openxmlformats.org/drawingml/2006/main"/>
-          <a:ln xmlns:a="http://schemas.openxmlformats.org/drawingml/2006/main" w="0">
-            <a:noFill/>
-          </a:ln>
-        </p:spPr>
-        <p:txBody>
-          <a:bodyPr xmlns:a="http://schemas.openxmlformats.org/drawingml/2006/main">
-            <a:noAutofit/>
-          </a:bodyPr>
-          <a:lstStyle xmlns:a="http://schemas.openxmlformats.org/drawingml/2006/main"/>
-          <a:p xmlns:a="http://schemas.openxmlformats.org/drawingml/2006/main">
-            <a:pPr>
-              <a:defRPr sz="2775" b="0">
-                <a:solidFill>
-                  <a:srgbClr val="173044"/>
-                </a:solidFill>
-                <a:latin typeface="Arial"/>
-                <a:ea typeface="Arial"/>
-                <a:cs typeface="Arial"/>
-              </a:defRPr>
-            </a:pPr>
-            <a:r>
-              <a:rPr sz="2775" b="0">
-                <a:solidFill>
-                  <a:srgbClr val="173044"/>
-                </a:solidFill>
-                <a:latin typeface="Arial"/>
-                <a:ea typeface="Arial"/>
-                <a:cs typeface="Arial"/>
-              </a:rPr>
-              <a:t>What can you now explain or do that you could not do at the beginning? What would you like to try next?</a:t>
-            </a:r>
-          </a:p>
-        </p:txBody>
-      </p:sp>
-      <p:sp>
-        <p:nvSpPr>
-          <p:cNvPr id="3" name="">
-            <a:extLst xmlns:a="http://schemas.openxmlformats.org/drawingml/2006/main">
-              <a:ext uri="{FF2B5EF4-FFF2-40B4-BE49-F238E27FC236}">
-                <a16:creationId xmlns:a16="http://schemas.microsoft.com/office/drawing/2014/main" id="{1757C5D9-27DC-427D-ACB6-7C3B43EDE640}"/>
-              </a:ext>
-            </a:extLst>
-          </p:cNvPr>
-          <p:cNvSpPr>
-            <a:spLocks xmlns:a="http://schemas.openxmlformats.org/drawingml/2006/main" noGrp="1"/>
-          </p:cNvSpPr>
-          <p:nvPr/>
-        </p:nvSpPr>
-        <p:spPr>
-          <a:xfrm xmlns:a="http://schemas.openxmlformats.org/drawingml/2006/main">
-            <a:off x="762000" y="4629150"/>
-            <a:ext cx="10477500" cy="952500"/>
-          </a:xfrm>
-          <a:prstGeom xmlns:a="http://schemas.openxmlformats.org/drawingml/2006/main" prst="rect">
-            <a:avLst/>
-          </a:prstGeom>
-          <a:noFill xmlns:a="http://schemas.openxmlformats.org/drawingml/2006/main"/>
-          <a:ln xmlns:a="http://schemas.openxmlformats.org/drawingml/2006/main" w="0">
-            <a:noFill/>
-          </a:ln>
-        </p:spPr>
-        <p:txBody>
-          <a:bodyPr xmlns:a="http://schemas.openxmlformats.org/drawingml/2006/main">
-            <a:noAutofit/>
-          </a:bodyPr>
-          <a:lstStyle xmlns:a="http://schemas.openxmlformats.org/drawingml/2006/main"/>
-          <a:p xmlns:a="http://schemas.openxmlformats.org/drawingml/2006/main">
-            <a:pPr>
-              <a:defRPr sz="2175" b="0">
-                <a:solidFill>
-                  <a:srgbClr val="006E75"/>
-                </a:solidFill>
-                <a:latin typeface="Arial"/>
-                <a:ea typeface="Arial"/>
-                <a:cs typeface="Arial"/>
-              </a:defRPr>
-            </a:pPr>
-            <a:r>
-              <a:rPr sz="2175" b="0">
-                <a:solidFill>
-                  <a:srgbClr val="006E75"/>
-                </a:solidFill>
-                <a:latin typeface="Arial"/>
-                <a:ea typeface="Arial"/>
-                <a:cs typeface="Arial"/>
-              </a:rPr>
-              <a:t>Save your project. Reset the robot and parts for the next pair.</a:t>
-            </a:r>
-          </a:p>
-        </p:txBody>
-      </p:sp>
-      <p:sp>
-        <p:nvSpPr>
-          <p:cNvPr id="4" name="">
-            <a:extLst xmlns:a="http://schemas.openxmlformats.org/drawingml/2006/main">
-              <a:ext uri="{FF2B5EF4-FFF2-40B4-BE49-F238E27FC236}">
-                <a16:creationId xmlns:a16="http://schemas.microsoft.com/office/drawing/2014/main" id="{D7778779-C43F-4BFA-89FA-E97AA9FBF252}"/>
-              </a:ext>
-            </a:extLst>
-          </p:cNvPr>
-          <p:cNvSpPr>
-            <a:spLocks xmlns:a="http://schemas.openxmlformats.org/drawingml/2006/main" noGrp="1"/>
-          </p:cNvSpPr>
-          <p:nvPr/>
-        </p:nvSpPr>
-        <p:spPr>
-          <a:xfrm xmlns:a="http://schemas.openxmlformats.org/drawingml/2006/main">
-            <a:off x="762000" y="6181725"/>
-            <a:ext cx="10572750" cy="285750"/>
-          </a:xfrm>
-          <a:prstGeom xmlns:a="http://schemas.openxmlformats.org/drawingml/2006/main" prst="rect">
-            <a:avLst/>
-          </a:prstGeom>
-          <a:noFill xmlns:a="http://schemas.openxmlformats.org/drawingml/2006/main"/>
-          <a:ln xmlns:a="http://schemas.openxmlformats.org/drawingml/2006/main" w="0">
-            <a:noFill/>
-          </a:ln>
-        </p:spPr>
-        <p:txBody>
-          <a:bodyPr xmlns:a="http://schemas.openxmlformats.org/drawingml/2006/main">
-            <a:noAutofit/>
-          </a:bodyPr>
-          <a:lstStyle xmlns:a="http://schemas.openxmlformats.org/drawingml/2006/main"/>
-          <a:p xmlns:a="http://schemas.openxmlformats.org/drawingml/2006/main">
-            <a:pPr>
-              <a:defRPr sz="1425" b="0">
-                <a:solidFill>
-                  <a:srgbClr val="536A77"/>
-                </a:solidFill>
-                <a:latin typeface="Arial"/>
-                <a:ea typeface="Arial"/>
-                <a:cs typeface="Arial"/>
-              </a:defRPr>
-            </a:pPr>
-            <a:r>
-              <a:rPr sz="1425" b="0">
-                <a:solidFill>
-                  <a:srgbClr val="536A77"/>
-                </a:solidFill>
-                <a:latin typeface="Arial"/>
-                <a:ea typeface="Arial"/>
-                <a:cs typeface="Arial"/>
-              </a:rPr>
-              <a:t>FRC includes programming, design, fabrication, outreach, media, and team operations.</a:t>
+              <a:t>Save your team project. Store your build. Reset the robot and parts.</a:t>
             </a:r>
           </a:p>
         </p:txBody>

--- a/03_Presentations/W08_showcase.pptx
+++ b/03_Presentations/W08_showcase.pptx
@@ -2,18 +2,18 @@
 <file path=ppt/presentation.xml><?xml version="1.0" encoding="utf-8"?>
 <p:presentation xmlns:p="http://schemas.openxmlformats.org/presentationml/2006/main">
   <p:sldMasterIdLst>
-    <p:sldMasterId xmlns:r="http://schemas.openxmlformats.org/officeDocument/2006/relationships" id="2147483648" r:id="Rdff14fc965fd4f58"/>
+    <p:sldMasterId xmlns:r="http://schemas.openxmlformats.org/officeDocument/2006/relationships" id="2147483648" r:id="R5dafbd9accf94519"/>
   </p:sldMasterIdLst>
   <p:notesMasterIdLst>
-    <p:notesMasterId xmlns:r="http://schemas.openxmlformats.org/officeDocument/2006/relationships" r:id="Rde98ea10f5054188"/>
+    <p:notesMasterId xmlns:r="http://schemas.openxmlformats.org/officeDocument/2006/relationships" r:id="Ra2707a97b3fb49d3"/>
   </p:notesMasterIdLst>
   <p:sldIdLst>
-    <p:sldId xmlns:r="http://schemas.openxmlformats.org/officeDocument/2006/relationships" id="256" r:id="Rb5bcf9375b7e4000"/>
-    <p:sldId xmlns:r="http://schemas.openxmlformats.org/officeDocument/2006/relationships" id="257" r:id="R5174a5ceba7a4392"/>
-    <p:sldId xmlns:r="http://schemas.openxmlformats.org/officeDocument/2006/relationships" id="258" r:id="Ref0b421d99be4243"/>
-    <p:sldId xmlns:r="http://schemas.openxmlformats.org/officeDocument/2006/relationships" id="259" r:id="R9f6c2d46b9e64eb4"/>
-    <p:sldId xmlns:r="http://schemas.openxmlformats.org/officeDocument/2006/relationships" id="260" r:id="Rc1239d93d903497f"/>
-    <p:sldId xmlns:r="http://schemas.openxmlformats.org/officeDocument/2006/relationships" id="261" r:id="R5dfda788659a48e3"/>
+    <p:sldId xmlns:r="http://schemas.openxmlformats.org/officeDocument/2006/relationships" id="256" r:id="R215b4720e2934151"/>
+    <p:sldId xmlns:r="http://schemas.openxmlformats.org/officeDocument/2006/relationships" id="257" r:id="R9b3cbbbe47724124"/>
+    <p:sldId xmlns:r="http://schemas.openxmlformats.org/officeDocument/2006/relationships" id="258" r:id="R17c8e5c7d3c2427d"/>
+    <p:sldId xmlns:r="http://schemas.openxmlformats.org/officeDocument/2006/relationships" id="259" r:id="R81314fba527543fe"/>
+    <p:sldId xmlns:r="http://schemas.openxmlformats.org/officeDocument/2006/relationships" id="260" r:id="R247bd9e38e4d4355"/>
+    <p:sldId xmlns:r="http://schemas.openxmlformats.org/officeDocument/2006/relationships" id="261" r:id="R2dd9d8bba74a4126"/>
   </p:sldIdLst>
   <p:sldSz cx="12192000" cy="6858000"/>
   <p:notesSz cx="6858000" cy="9144000"/>
@@ -447,96 +447,6 @@
           <a:lstStyle xmlns:a="http://schemas.openxmlformats.org/drawingml/2006/main"/>
           <a:p xmlns:a="http://schemas.openxmlformats.org/drawingml/2006/main">
             <a:r>
-              <a:t>PREPARATION</a:t>
-            </a:r>
-          </a:p>
-          <a:p xmlns:a="http://schemas.openxmlformats.org/drawingml/2006/main">
-            <a:r>
-              <a:t/>
-            </a:r>
-          </a:p>
-          <a:p xmlns:a="http://schemas.openxmlformats.org/drawingml/2006/main">
-            <a:r>
-              <a:t>Week 8 Robot showcase</a:t>
-            </a:r>
-          </a:p>
-          <a:p xmlns:a="http://schemas.openxmlformats.org/drawingml/2006/main">
-            <a:r>
-              <a:t/>
-            </a:r>
-          </a:p>
-          <a:p xmlns:a="http://schemas.openxmlformats.org/drawingml/2006/main">
-            <a:r>
-              <a:t>Speaker notes for the six-slide class presentation. Use the slides as brief prompts and leave time for children to build, operate and explain. This is a robotics session with a small prepared Python recipe.</a:t>
-            </a:r>
-          </a:p>
-          <a:p xmlns:a="http://schemas.openxmlformats.org/drawingml/2006/main">
-            <a:r>
-              <a:t/>
-            </a:r>
-          </a:p>
-          <a:p xmlns:a="http://schemas.openxmlformats.org/drawingml/2006/main">
-            <a:r>
-              <a:t>Class setup</a:t>
-            </a:r>
-          </a:p>
-          <a:p xmlns:a="http://schemas.openxmlformats.org/drawingml/2006/main">
-            <a:r>
-              <a:t/>
-            </a:r>
-          </a:p>
-          <a:p xmlns:a="http://schemas.openxmlformats.org/drawingml/2006/main">
-            <a:r>
-              <a:t>12 children in grades 5–6 form four teams of three: T1/T2 share Kit A and T3/T4 share Kit B. Four student instructors cover two robot stations and two build tables; a fifth or sixth can float. The adult lead oversees the room and YMCA procedures. Bring four available laptops: two remain connected to robots and two show build references. Printed build cards make the build activity work with two laptops too.</a:t>
-            </a:r>
-          </a:p>
-          <a:p xmlns:a="http://schemas.openxmlformats.org/drawingml/2006/main">
-            <a:r>
-              <a:t/>
-            </a:r>
-          </a:p>
-          <a:p xmlns:a="http://schemas.openxmlformats.org/drawingml/2006/main">
-            <a:r>
-              <a:t>Learning goal Each child explains a programming idea and compares a prediction with a result in a short demonstration.</a:t>
-            </a:r>
-          </a:p>
-          <a:p xmlns:a="http://schemas.openxmlformats.org/drawingml/2006/main">
-            <a:r>
-              <a:t/>
-            </a:r>
-          </a:p>
-          <a:p xmlns:a="http://schemas.openxmlformats.org/drawingml/2006/main">
-            <a:r>
-              <a:t>Minimum success Every team demonstrates or explains its prototype, every student completes the final assessment, and families receive an optional next-step invitation through the adult coordinator.</a:t>
-            </a:r>
-          </a:p>
-          <a:p xmlns:a="http://schemas.openxmlformats.org/drawingml/2006/main">
-            <a:r>
-              <a:t/>
-            </a:r>
-          </a:p>
-          <a:p xmlns:a="http://schemas.openxmlformats.org/drawingml/2006/main">
-            <a:r>
-              <a:t>Prepare Confirm any visitors with YMCA staff. Load team projects and inspect lanes before arrival. Use W08_showcase.py only as a clean fallback; normally reopen the team’s week 7 program. No last-minute firmware update. Prepare two mentor examples and four labeled team build packs. Rehearse attachment clearance, a hand test and a quick swap. Show the hub color guide.</a:t>
-            </a:r>
-          </a:p>
-          <a:p xmlns:a="http://schemas.openxmlformats.org/drawingml/2006/main">
-            <a:r>
-              <a:t/>
-            </a:r>
-          </a:p>
-          <a:p xmlns:a="http://schemas.openxmlformats.org/drawingml/2006/main">
-            <a:r>
-              <a:t>Materials and files Print and pack from the matching checklist in 01_Instructor/Class_Preparation. Use the team sheet and build card. Keep the original two bases assembled, A left/B right, auxiliary motor unplugged; add C/D only as the lessons require. Hardware rehearsal remains required.</a:t>
-            </a:r>
-          </a:p>
-          <a:p xmlns:a="http://schemas.openxmlformats.org/drawingml/2006/main">
-            <a:r>
-              <a:t/>
-            </a:r>
-          </a:p>
-          <a:p xmlns:a="http://schemas.openxmlformats.org/drawingml/2006/main">
-            <a:r>
               <a:t>Slide 1 Robot showcase</a:t>
             </a:r>
           </a:p>
@@ -1207,7 +1117,7 @@
           </a:p>
           <a:p xmlns:a="http://schemas.openxmlformats.org/drawingml/2006/main">
             <a:r>
-              <a:t>Listen for Use the same baseline key in the instructor guide. Report what actually happened during the demo, not the intended outcome. Future FRC interest is optional and separate from demonstrated learning.</a:t>
+              <a:t>Listen for Use the concept-question key in the instructor guide. Report what actually happened during the demo, not the intended outcome. Future FRC interest is optional and separate from demonstrated learning.</a:t>
             </a:r>
           </a:p>
           <a:p xmlns:a="http://schemas.openxmlformats.org/drawingml/2006/main">
@@ -1295,7 +1205,7 @@
   </p:cSld>
   <p:clrMap bg1="lt1" tx1="dk1" bg2="lt2" tx2="dk2" accent1="accent1" accent2="accent2" accent3="accent3" accent4="accent4" accent5="accent5" accent6="accent6" hlink="hlink" folHlink="folHlink"/>
   <p:sldLayoutIdLst>
-    <p:sldLayoutId xmlns:r="http://schemas.openxmlformats.org/officeDocument/2006/relationships" id="2147483649" r:id="Rb15c72ba4dde486f"/>
+    <p:sldLayoutId xmlns:r="http://schemas.openxmlformats.org/officeDocument/2006/relationships" id="2147483649" r:id="R121dcbf467cf47bf"/>
   </p:sldLayoutIdLst>
   <p:txStyles>
     <p:titleStyle>

--- a/03_Presentations/W08_showcase.pptx
+++ b/03_Presentations/W08_showcase.pptx
@@ -2,18 +2,18 @@
 <file path=ppt/presentation.xml><?xml version="1.0" encoding="utf-8"?>
 <p:presentation xmlns:p="http://schemas.openxmlformats.org/presentationml/2006/main">
   <p:sldMasterIdLst>
-    <p:sldMasterId xmlns:r="http://schemas.openxmlformats.org/officeDocument/2006/relationships" id="2147483648" r:id="R5dafbd9accf94519"/>
+    <p:sldMasterId xmlns:r="http://schemas.openxmlformats.org/officeDocument/2006/relationships" id="2147483648" r:id="R2fdbd526ff7e47b9"/>
   </p:sldMasterIdLst>
   <p:notesMasterIdLst>
-    <p:notesMasterId xmlns:r="http://schemas.openxmlformats.org/officeDocument/2006/relationships" r:id="Ra2707a97b3fb49d3"/>
+    <p:notesMasterId xmlns:r="http://schemas.openxmlformats.org/officeDocument/2006/relationships" r:id="R85a38cf64fcf4a8e"/>
   </p:notesMasterIdLst>
   <p:sldIdLst>
-    <p:sldId xmlns:r="http://schemas.openxmlformats.org/officeDocument/2006/relationships" id="256" r:id="R215b4720e2934151"/>
-    <p:sldId xmlns:r="http://schemas.openxmlformats.org/officeDocument/2006/relationships" id="257" r:id="R9b3cbbbe47724124"/>
-    <p:sldId xmlns:r="http://schemas.openxmlformats.org/officeDocument/2006/relationships" id="258" r:id="R17c8e5c7d3c2427d"/>
-    <p:sldId xmlns:r="http://schemas.openxmlformats.org/officeDocument/2006/relationships" id="259" r:id="R81314fba527543fe"/>
-    <p:sldId xmlns:r="http://schemas.openxmlformats.org/officeDocument/2006/relationships" id="260" r:id="R247bd9e38e4d4355"/>
-    <p:sldId xmlns:r="http://schemas.openxmlformats.org/officeDocument/2006/relationships" id="261" r:id="R2dd9d8bba74a4126"/>
+    <p:sldId xmlns:r="http://schemas.openxmlformats.org/officeDocument/2006/relationships" id="256" r:id="R29aae1ed697f49df"/>
+    <p:sldId xmlns:r="http://schemas.openxmlformats.org/officeDocument/2006/relationships" id="257" r:id="Re02798b1cba74950"/>
+    <p:sldId xmlns:r="http://schemas.openxmlformats.org/officeDocument/2006/relationships" id="258" r:id="R3d80981690e74d3d"/>
+    <p:sldId xmlns:r="http://schemas.openxmlformats.org/officeDocument/2006/relationships" id="259" r:id="Ra738d8ed5c664bbe"/>
+    <p:sldId xmlns:r="http://schemas.openxmlformats.org/officeDocument/2006/relationships" id="260" r:id="Ra4718d85821f4c48"/>
+    <p:sldId xmlns:r="http://schemas.openxmlformats.org/officeDocument/2006/relationships" id="261" r:id="R5f1b971a606043ba"/>
   </p:sldIdLst>
   <p:sldSz cx="12192000" cy="6858000"/>
   <p:notesSz cx="6858000" cy="9144000"/>
@@ -447,6 +447,96 @@
           <a:lstStyle xmlns:a="http://schemas.openxmlformats.org/drawingml/2006/main"/>
           <a:p xmlns:a="http://schemas.openxmlformats.org/drawingml/2006/main">
             <a:r>
+              <a:t>PREPARATION</a:t>
+            </a:r>
+          </a:p>
+          <a:p xmlns:a="http://schemas.openxmlformats.org/drawingml/2006/main">
+            <a:r>
+              <a:t/>
+            </a:r>
+          </a:p>
+          <a:p xmlns:a="http://schemas.openxmlformats.org/drawingml/2006/main">
+            <a:r>
+              <a:t>Week 8 Robot showcase</a:t>
+            </a:r>
+          </a:p>
+          <a:p xmlns:a="http://schemas.openxmlformats.org/drawingml/2006/main">
+            <a:r>
+              <a:t/>
+            </a:r>
+          </a:p>
+          <a:p xmlns:a="http://schemas.openxmlformats.org/drawingml/2006/main">
+            <a:r>
+              <a:t>Speaker notes for the six-slide class presentation. Use the slides as brief prompts and leave time for children to build, operate and explain. This is a robotics session with a small prepared Python recipe.</a:t>
+            </a:r>
+          </a:p>
+          <a:p xmlns:a="http://schemas.openxmlformats.org/drawingml/2006/main">
+            <a:r>
+              <a:t/>
+            </a:r>
+          </a:p>
+          <a:p xmlns:a="http://schemas.openxmlformats.org/drawingml/2006/main">
+            <a:r>
+              <a:t>Class setup</a:t>
+            </a:r>
+          </a:p>
+          <a:p xmlns:a="http://schemas.openxmlformats.org/drawingml/2006/main">
+            <a:r>
+              <a:t/>
+            </a:r>
+          </a:p>
+          <a:p xmlns:a="http://schemas.openxmlformats.org/drawingml/2006/main">
+            <a:r>
+              <a:t>12 children in grades 5–6 form four teams of three: T1/T2 share Kit A and T3/T4 share Kit B. Four student instructors cover two robot stations and two build tables; a fifth or sixth can float. The adult lead oversees the room and YMCA procedures. Bring four available laptops: two remain connected to robots and two show build references. Printed build cards make the build activity work with two laptops too.</a:t>
+            </a:r>
+          </a:p>
+          <a:p xmlns:a="http://schemas.openxmlformats.org/drawingml/2006/main">
+            <a:r>
+              <a:t/>
+            </a:r>
+          </a:p>
+          <a:p xmlns:a="http://schemas.openxmlformats.org/drawingml/2006/main">
+            <a:r>
+              <a:t>Learning goal Each child explains a programming idea and compares a prediction with a result in a short demonstration.</a:t>
+            </a:r>
+          </a:p>
+          <a:p xmlns:a="http://schemas.openxmlformats.org/drawingml/2006/main">
+            <a:r>
+              <a:t/>
+            </a:r>
+          </a:p>
+          <a:p xmlns:a="http://schemas.openxmlformats.org/drawingml/2006/main">
+            <a:r>
+              <a:t>Minimum success Every team demonstrates or explains its prototype, every student completes the final assessment, and families receive an optional next-step invitation through the adult coordinator.</a:t>
+            </a:r>
+          </a:p>
+          <a:p xmlns:a="http://schemas.openxmlformats.org/drawingml/2006/main">
+            <a:r>
+              <a:t/>
+            </a:r>
+          </a:p>
+          <a:p xmlns:a="http://schemas.openxmlformats.org/drawingml/2006/main">
+            <a:r>
+              <a:t>Prepare Confirm any visitors with YMCA staff. Load team projects and inspect lanes before arrival. Use W08_showcase.py only as a clean fallback; normally reopen the team’s week 7 program. No last-minute firmware update. Prepare two mentor examples and four labeled team build packs. Rehearse attachment clearance, a hand test and a quick swap. Show the hub color guide.</a:t>
+            </a:r>
+          </a:p>
+          <a:p xmlns:a="http://schemas.openxmlformats.org/drawingml/2006/main">
+            <a:r>
+              <a:t/>
+            </a:r>
+          </a:p>
+          <a:p xmlns:a="http://schemas.openxmlformats.org/drawingml/2006/main">
+            <a:r>
+              <a:t>Materials and files Print and pack from the matching checklist in 01_Instructor/Class_Preparation. Use the team sheet and build card. Keep the original two bases assembled, A left/B right, auxiliary motor unplugged; add C/D only as the lessons require. Hardware rehearsal remains required.</a:t>
+            </a:r>
+          </a:p>
+          <a:p xmlns:a="http://schemas.openxmlformats.org/drawingml/2006/main">
+            <a:r>
+              <a:t/>
+            </a:r>
+          </a:p>
+          <a:p xmlns:a="http://schemas.openxmlformats.org/drawingml/2006/main">
+            <a:r>
               <a:t>Slide 1 Robot showcase</a:t>
             </a:r>
           </a:p>
@@ -1205,7 +1295,7 @@
   </p:cSld>
   <p:clrMap bg1="lt1" tx1="dk1" bg2="lt2" tx2="dk2" accent1="accent1" accent2="accent2" accent3="accent3" accent4="accent4" accent5="accent5" accent6="accent6" hlink="hlink" folHlink="folHlink"/>
   <p:sldLayoutIdLst>
-    <p:sldLayoutId xmlns:r="http://schemas.openxmlformats.org/officeDocument/2006/relationships" id="2147483649" r:id="R121dcbf467cf47bf"/>
+    <p:sldLayoutId xmlns:r="http://schemas.openxmlformats.org/officeDocument/2006/relationships" id="2147483649" r:id="R84ecacd1ea8b4740"/>
   </p:sldLayoutIdLst>
   <p:txStyles>
     <p:titleStyle>
